--- a/static/ppts/G7_Sci_Newtons_Laws.pptx
+++ b/static/ppts/G7_Sci_Newtons_Laws.pptx
@@ -11,9 +11,11 @@
     <p:sldId id="259" r:id="rId5"/>
     <p:sldId id="260" r:id="rId6"/>
     <p:sldId id="261" r:id="rId7"/>
+    <p:sldId id="262" r:id="rId8"/>
+    <p:sldId id="263" r:id="rId9"/>
   </p:sldIdLst>
   <p:notesMasterIdLst>
-    <p:notesMasterId r:id="rId8"/>
+    <p:notesMasterId r:id="rId10"/>
   </p:notesMasterIdLst>
   <p:sldSz cx="9144000" cy="5143500"/>
   <p:notesSz cx="5143500" cy="9144000"/>
@@ -971,6 +973,182 @@
             <a:fld id="{F7021451-1387-4CA6-816F-3879F97B5CBC}" type="slidenum">
               <a:rPr lang="en-US"/>
               <a:t>6</a:t>
+            </a:fld>
+            <a:endParaRPr lang="en-US"/>
+          </a:p>
+        </p:txBody>
+      </p:sp>
+    </p:spTree>
+    <p:extLst>
+      <p:ext uri="{BB962C8B-B14F-4D97-AF65-F5344CB8AC3E}">
+        <p14:creationId xmlns:p14="http://schemas.microsoft.com/office/powerpoint/2010/main" val="1024086991"/>
+      </p:ext>
+    </p:extLst>
+  </p:cSld>
+  <p:clrMapOvr>
+    <a:masterClrMapping/>
+  </p:clrMapOvr>
+</p:notes>
+</file>
+
+<file path=ppt/notesSlides/notesSlide7.xml><?xml version="1.0" encoding="utf-8"?>
+<p:notes xmlns:a="http://schemas.openxmlformats.org/drawingml/2006/main" xmlns:r="http://schemas.openxmlformats.org/officeDocument/2006/relationships" xmlns:p="http://schemas.openxmlformats.org/presentationml/2006/main">
+  <p:cSld>
+    <p:spTree>
+      <p:nvGrpSpPr>
+        <p:cNvPr id="1" name=""/>
+        <p:cNvGrpSpPr/>
+        <p:nvPr/>
+      </p:nvGrpSpPr>
+      <p:grpSpPr>
+        <a:xfrm>
+          <a:off x="0" y="0"/>
+          <a:ext cx="0" cy="0"/>
+          <a:chOff x="0" y="0"/>
+          <a:chExt cx="0" cy="0"/>
+        </a:xfrm>
+      </p:grpSpPr>
+      <p:sp>
+        <p:nvSpPr>
+          <p:cNvPr id="2" name="Slide Image Placeholder 1"/>
+          <p:cNvSpPr>
+            <a:spLocks noGrp="1" noRot="1" noChangeAspect="1"/>
+          </p:cNvSpPr>
+          <p:nvPr>
+            <p:ph type="sldImg"/>
+          </p:nvPr>
+        </p:nvSpPr>
+        <p:spPr/>
+      </p:sp>
+      <p:sp>
+        <p:nvSpPr>
+          <p:cNvPr id="3" name="Notes Placeholder 2"/>
+          <p:cNvSpPr>
+            <a:spLocks noGrp="1"/>
+          </p:cNvSpPr>
+          <p:nvPr>
+            <p:ph type="body" idx="1"/>
+          </p:nvPr>
+        </p:nvSpPr>
+        <p:spPr/>
+        <p:txBody>
+          <a:bodyPr/>
+          <a:lstStyle/>
+          <a:p>
+            <a:r>
+              <a:rPr lang="en-US" dirty="0"/>
+              <a:t/>
+            </a:r>
+            <a:endParaRPr lang="en-US" dirty="0"/>
+          </a:p>
+        </p:txBody>
+      </p:sp>
+      <p:sp>
+        <p:nvSpPr>
+          <p:cNvPr id="4" name="Slide Number Placeholder 3"/>
+          <p:cNvSpPr>
+            <a:spLocks noGrp="1"/>
+          </p:cNvSpPr>
+          <p:nvPr>
+            <p:ph type="sldNum" sz="quarter" idx="10"/>
+          </p:nvPr>
+        </p:nvSpPr>
+        <p:spPr/>
+        <p:txBody>
+          <a:bodyPr/>
+          <a:lstStyle/>
+          <a:p>
+            <a:fld id="{F7021451-1387-4CA6-816F-3879F97B5CBC}" type="slidenum">
+              <a:rPr lang="en-US"/>
+              <a:t>7</a:t>
+            </a:fld>
+            <a:endParaRPr lang="en-US"/>
+          </a:p>
+        </p:txBody>
+      </p:sp>
+    </p:spTree>
+    <p:extLst>
+      <p:ext uri="{BB962C8B-B14F-4D97-AF65-F5344CB8AC3E}">
+        <p14:creationId xmlns:p14="http://schemas.microsoft.com/office/powerpoint/2010/main" val="1024086991"/>
+      </p:ext>
+    </p:extLst>
+  </p:cSld>
+  <p:clrMapOvr>
+    <a:masterClrMapping/>
+  </p:clrMapOvr>
+</p:notes>
+</file>
+
+<file path=ppt/notesSlides/notesSlide8.xml><?xml version="1.0" encoding="utf-8"?>
+<p:notes xmlns:a="http://schemas.openxmlformats.org/drawingml/2006/main" xmlns:r="http://schemas.openxmlformats.org/officeDocument/2006/relationships" xmlns:p="http://schemas.openxmlformats.org/presentationml/2006/main">
+  <p:cSld>
+    <p:spTree>
+      <p:nvGrpSpPr>
+        <p:cNvPr id="1" name=""/>
+        <p:cNvGrpSpPr/>
+        <p:nvPr/>
+      </p:nvGrpSpPr>
+      <p:grpSpPr>
+        <a:xfrm>
+          <a:off x="0" y="0"/>
+          <a:ext cx="0" cy="0"/>
+          <a:chOff x="0" y="0"/>
+          <a:chExt cx="0" cy="0"/>
+        </a:xfrm>
+      </p:grpSpPr>
+      <p:sp>
+        <p:nvSpPr>
+          <p:cNvPr id="2" name="Slide Image Placeholder 1"/>
+          <p:cNvSpPr>
+            <a:spLocks noGrp="1" noRot="1" noChangeAspect="1"/>
+          </p:cNvSpPr>
+          <p:nvPr>
+            <p:ph type="sldImg"/>
+          </p:nvPr>
+        </p:nvSpPr>
+        <p:spPr/>
+      </p:sp>
+      <p:sp>
+        <p:nvSpPr>
+          <p:cNvPr id="3" name="Notes Placeholder 2"/>
+          <p:cNvSpPr>
+            <a:spLocks noGrp="1"/>
+          </p:cNvSpPr>
+          <p:nvPr>
+            <p:ph type="body" idx="1"/>
+          </p:nvPr>
+        </p:nvSpPr>
+        <p:spPr/>
+        <p:txBody>
+          <a:bodyPr/>
+          <a:lstStyle/>
+          <a:p>
+            <a:r>
+              <a:rPr lang="en-US" dirty="0"/>
+              <a:t/>
+            </a:r>
+            <a:endParaRPr lang="en-US" dirty="0"/>
+          </a:p>
+        </p:txBody>
+      </p:sp>
+      <p:sp>
+        <p:nvSpPr>
+          <p:cNvPr id="4" name="Slide Number Placeholder 3"/>
+          <p:cNvSpPr>
+            <a:spLocks noGrp="1"/>
+          </p:cNvSpPr>
+          <p:nvPr>
+            <p:ph type="sldNum" sz="quarter" idx="10"/>
+          </p:nvPr>
+        </p:nvSpPr>
+        <p:spPr/>
+        <p:txBody>
+          <a:bodyPr/>
+          <a:lstStyle/>
+          <a:p>
+            <a:fld id="{F7021451-1387-4CA6-816F-3879F97B5CBC}" type="slidenum">
+              <a:rPr lang="en-US"/>
+              <a:t>8</a:t>
             </a:fld>
             <a:endParaRPr lang="en-US"/>
           </a:p>
@@ -1425,38 +1603,55 @@
                 <a:ea typeface="Georgia" pitchFamily="34" charset="-122"/>
                 <a:cs typeface="Georgia" pitchFamily="34" charset="-120"/>
               </a:rPr>
-              <a:t>Newton's Laws of Motion</a:t>
+              <a:t>Newton's Laws</a:t>
             </a:r>
             <a:endParaRPr lang="en-US" sz="4000" dirty="0"/>
           </a:p>
-        </p:txBody>
-      </p:sp>
-      <p:sp>
-        <p:nvSpPr>
-          <p:cNvPr id="6" name="Text 4"/>
-          <p:cNvSpPr/>
-          <p:nvPr/>
-        </p:nvSpPr>
-        <p:spPr>
-          <a:xfrm>
-            <a:off x="731520" y="3200400"/>
-            <a:ext cx="7680960" cy="548640"/>
-          </a:xfrm>
-          <a:prstGeom prst="rect">
-            <a:avLst/>
-          </a:prstGeom>
-          <a:noFill/>
-          <a:ln/>
-        </p:spPr>
-        <p:txBody>
-          <a:bodyPr wrap="square" rtlCol="0" anchor="ctr"/>
-          <a:lstStyle/>
           <a:p>
             <a:pPr indent="0" marL="0">
               <a:buNone/>
             </a:pPr>
             <a:r>
-              <a:rPr lang="en-US" sz="1600" dirty="0">
+              <a:rPr lang="en-US" sz="4000" b="1" dirty="0">
+                <a:solidFill>
+                  <a:srgbClr val="FFFFFF"/>
+                </a:solidFill>
+                <a:latin typeface="Georgia" pitchFamily="34" charset="0"/>
+                <a:ea typeface="Georgia" pitchFamily="34" charset="-122"/>
+                <a:cs typeface="Georgia" pitchFamily="34" charset="-120"/>
+              </a:rPr>
+              <a:t>of Motion</a:t>
+            </a:r>
+            <a:endParaRPr lang="en-US" sz="4000" dirty="0"/>
+          </a:p>
+        </p:txBody>
+      </p:sp>
+      <p:sp>
+        <p:nvSpPr>
+          <p:cNvPr id="6" name="Text 4"/>
+          <p:cNvSpPr/>
+          <p:nvPr/>
+        </p:nvSpPr>
+        <p:spPr>
+          <a:xfrm>
+            <a:off x="731520" y="3200400"/>
+            <a:ext cx="7680960" cy="548640"/>
+          </a:xfrm>
+          <a:prstGeom prst="rect">
+            <a:avLst/>
+          </a:prstGeom>
+          <a:noFill/>
+          <a:ln/>
+        </p:spPr>
+        <p:txBody>
+          <a:bodyPr wrap="square" rtlCol="0" anchor="ctr"/>
+          <a:lstStyle/>
+          <a:p>
+            <a:pPr indent="0" marL="0">
+              <a:buNone/>
+            </a:pPr>
+            <a:r>
+              <a:rPr lang="en-US" sz="1600" i="1" dirty="0">
                 <a:solidFill>
                   <a:srgbClr val="9B9690"/>
                 </a:solidFill>
@@ -1464,7 +1659,7 @@
                 <a:ea typeface="Calibri" pitchFamily="34" charset="-122"/>
                 <a:cs typeface="Calibri" pitchFamily="34" charset="-120"/>
               </a:rPr>
-              <a:t>The rules that govern how objects move</a:t>
+              <a:t>Three rules that explain how everything moves</a:t>
             </a:r>
             <a:endParaRPr lang="en-US" sz="1600" dirty="0"/>
           </a:p>
@@ -1495,7 +1690,7 @@
               <a:buNone/>
             </a:pPr>
             <a:r>
-              <a:rPr lang="en-US" sz="1100" dirty="0">
+              <a:rPr lang="en-US" sz="1200" dirty="0">
                 <a:solidFill>
                   <a:srgbClr val="6B6660"/>
                 </a:solidFill>
@@ -1503,9 +1698,9 @@
                 <a:ea typeface="Calibri" pitchFamily="34" charset="-122"/>
                 <a:cs typeface="Calibri" pitchFamily="34" charset="-120"/>
               </a:rPr>
-              <a:t>Mr Zocchi · NIS</a:t>
-            </a:r>
-            <a:endParaRPr lang="en-US" sz="1100" dirty="0"/>
+              <a:t>Mr Zocchi</a:t>
+            </a:r>
+            <a:endParaRPr lang="en-US" sz="1200" dirty="0"/>
           </a:p>
         </p:txBody>
       </p:sp>
@@ -1549,41 +1744,21 @@
             <a:avLst/>
           </a:prstGeom>
           <a:solidFill>
-            <a:srgbClr val="FAF8F5"/>
+            <a:srgbClr val="111D35"/>
           </a:solidFill>
           <a:ln/>
         </p:spPr>
       </p:sp>
       <p:sp>
         <p:nvSpPr>
-          <p:cNvPr id="3" name="Shape 1"/>
-          <p:cNvSpPr/>
-          <p:nvPr/>
-        </p:nvSpPr>
-        <p:spPr>
-          <a:xfrm>
-            <a:off x="0" y="0"/>
-            <a:ext cx="9144000" cy="54864"/>
-          </a:xfrm>
-          <a:prstGeom prst="rect">
-            <a:avLst/>
-          </a:prstGeom>
-          <a:solidFill>
-            <a:srgbClr val="C8372D"/>
-          </a:solidFill>
-          <a:ln/>
-        </p:spPr>
-      </p:sp>
-      <p:sp>
-        <p:nvSpPr>
-          <p:cNvPr id="4" name="Text 2"/>
-          <p:cNvSpPr/>
-          <p:nvPr/>
-        </p:nvSpPr>
-        <p:spPr>
-          <a:xfrm>
-            <a:off x="640080" y="320040"/>
-            <a:ext cx="7863840" cy="640080"/>
+          <p:cNvPr id="3" name="Text 1"/>
+          <p:cNvSpPr/>
+          <p:nvPr/>
+        </p:nvSpPr>
+        <p:spPr>
+          <a:xfrm>
+            <a:off x="6858000" y="182880"/>
+            <a:ext cx="2286000" cy="2743200"/>
           </a:xfrm>
           <a:prstGeom prst="rect">
             <a:avLst/>
@@ -1592,37 +1767,39 @@
           <a:ln/>
         </p:spPr>
         <p:txBody>
-          <a:bodyPr wrap="square" lIns="0" tIns="0" rIns="0" bIns="0" rtlCol="0" anchor="ctr"/>
+          <a:bodyPr wrap="square" rtlCol="0" anchor="ctr"/>
           <a:lstStyle/>
           <a:p>
-            <a:pPr indent="0" marL="0">
+            <a:pPr algn="ctr" indent="0" marL="0">
               <a:buNone/>
             </a:pPr>
             <a:r>
-              <a:rPr lang="en-US" sz="2600" b="1" dirty="0">
+              <a:rPr lang="en-US" sz="16000" b="1" dirty="0">
                 <a:solidFill>
-                  <a:srgbClr val="1B2A4A"/>
+                  <a:srgbClr val="C8372D">
+                    <a:alpha val="80000"/>
+                  </a:srgbClr>
                 </a:solidFill>
                 <a:latin typeface="Georgia" pitchFamily="34" charset="0"/>
                 <a:ea typeface="Georgia" pitchFamily="34" charset="-122"/>
                 <a:cs typeface="Georgia" pitchFamily="34" charset="-120"/>
               </a:rPr>
-              <a:t>Newton's First Law</a:t>
-            </a:r>
-            <a:endParaRPr lang="en-US" sz="2600" dirty="0"/>
-          </a:p>
-        </p:txBody>
-      </p:sp>
-      <p:sp>
-        <p:nvSpPr>
-          <p:cNvPr id="5" name="Text 3"/>
-          <p:cNvSpPr/>
-          <p:nvPr/>
-        </p:nvSpPr>
-        <p:spPr>
-          <a:xfrm>
-            <a:off x="640080" y="1188720"/>
-            <a:ext cx="7863840" cy="3200400"/>
+              <a:t>?</a:t>
+            </a:r>
+            <a:endParaRPr lang="en-US" sz="16000" dirty="0"/>
+          </a:p>
+        </p:txBody>
+      </p:sp>
+      <p:sp>
+        <p:nvSpPr>
+          <p:cNvPr id="4" name="Text 2"/>
+          <p:cNvSpPr/>
+          <p:nvPr/>
+        </p:nvSpPr>
+        <p:spPr>
+          <a:xfrm>
+            <a:off x="731520" y="548640"/>
+            <a:ext cx="2743200" cy="365760"/>
           </a:xfrm>
           <a:prstGeom prst="rect">
             <a:avLst/>
@@ -1631,91 +1808,246 @@
           <a:ln/>
         </p:spPr>
         <p:txBody>
-          <a:bodyPr wrap="square" rtlCol="0" anchor="t"/>
+          <a:bodyPr wrap="square" rtlCol="0" anchor="ctr"/>
           <a:lstStyle/>
           <a:p>
-            <a:pPr marL="342900" indent="-342900">
-              <a:lnSpc>
-                <a:spcPct val="140000"/>
-              </a:lnSpc>
-              <a:buSzPct val="100000"/>
-              <a:buChar char="•"/>
+            <a:pPr indent="0" marL="0">
+              <a:buNone/>
             </a:pPr>
             <a:r>
-              <a:rPr lang="en-US" sz="1500" dirty="0">
+              <a:rPr lang="en-US" sz="1200" b="1" spc="400" kern="0" dirty="0">
                 <a:solidFill>
-                  <a:srgbClr val="3D3A36"/>
+                  <a:srgbClr val="C8372D"/>
                 </a:solidFill>
                 <a:latin typeface="Calibri" pitchFamily="34" charset="0"/>
                 <a:ea typeface="Calibri" pitchFamily="34" charset="-122"/>
                 <a:cs typeface="Calibri" pitchFamily="34" charset="-120"/>
               </a:rPr>
-              <a:t>An object stays still or moves at constant speed unless acted on by an unbalanced force.</a:t>
-            </a:r>
-            <a:endParaRPr lang="en-US" sz="1500" dirty="0"/>
-          </a:p>
-          <a:p>
-            <a:pPr marL="342900" indent="-342900">
-              <a:lnSpc>
-                <a:spcPct val="140000"/>
-              </a:lnSpc>
-              <a:buSzPct val="100000"/>
-              <a:buChar char="•"/>
+              <a:t>INQUIRY</a:t>
+            </a:r>
+            <a:endParaRPr lang="en-US" sz="1200" dirty="0"/>
+          </a:p>
+        </p:txBody>
+      </p:sp>
+      <p:sp>
+        <p:nvSpPr>
+          <p:cNvPr id="5" name="Text 3"/>
+          <p:cNvSpPr/>
+          <p:nvPr/>
+        </p:nvSpPr>
+        <p:spPr>
+          <a:xfrm>
+            <a:off x="731520" y="1005840"/>
+            <a:ext cx="6858000" cy="1463040"/>
+          </a:xfrm>
+          <a:prstGeom prst="rect">
+            <a:avLst/>
+          </a:prstGeom>
+          <a:noFill/>
+          <a:ln/>
+        </p:spPr>
+        <p:txBody>
+          <a:bodyPr wrap="square" rtlCol="0" anchor="t"/>
+          <a:lstStyle/>
+          <a:p>
+            <a:pPr indent="0" marL="0">
+              <a:buNone/>
             </a:pPr>
             <a:r>
-              <a:rPr lang="en-US" sz="1500" dirty="0">
+              <a:rPr lang="en-US" sz="2800" b="1" dirty="0">
                 <a:solidFill>
-                  <a:srgbClr val="3D3A36"/>
+                  <a:srgbClr val="FFFFFF"/>
+                </a:solidFill>
+                <a:latin typeface="Georgia" pitchFamily="34" charset="0"/>
+                <a:ea typeface="Georgia" pitchFamily="34" charset="-122"/>
+                <a:cs typeface="Georgia" pitchFamily="34" charset="-120"/>
+              </a:rPr>
+              <a:t>China's Long March 5 rocket weighs 867 tonnes. How does it lift off the ground?</a:t>
+            </a:r>
+            <a:endParaRPr lang="en-US" sz="2800" dirty="0"/>
+          </a:p>
+        </p:txBody>
+      </p:sp>
+      <p:sp>
+        <p:nvSpPr>
+          <p:cNvPr id="6" name="Text 4"/>
+          <p:cNvSpPr/>
+          <p:nvPr/>
+        </p:nvSpPr>
+        <p:spPr>
+          <a:xfrm>
+            <a:off x="731520" y="2560320"/>
+            <a:ext cx="6858000" cy="548640"/>
+          </a:xfrm>
+          <a:prstGeom prst="rect">
+            <a:avLst/>
+          </a:prstGeom>
+          <a:noFill/>
+          <a:ln/>
+        </p:spPr>
+        <p:txBody>
+          <a:bodyPr wrap="square" rtlCol="0" anchor="ctr"/>
+          <a:lstStyle/>
+          <a:p>
+            <a:pPr indent="0" marL="0">
+              <a:buNone/>
+            </a:pPr>
+            <a:r>
+              <a:rPr lang="en-US" sz="1400" i="1" dirty="0">
+                <a:solidFill>
+                  <a:srgbClr val="9B9690"/>
                 </a:solidFill>
                 <a:latin typeface="Calibri" pitchFamily="34" charset="0"/>
                 <a:ea typeface="Calibri" pitchFamily="34" charset="-122"/>
                 <a:cs typeface="Calibri" pitchFamily="34" charset="-120"/>
               </a:rPr>
-              <a:t>In simple terms: things keep doing what they're doing unless a force changes them.</a:t>
-            </a:r>
-            <a:endParaRPr lang="en-US" sz="1500" dirty="0"/>
-          </a:p>
-          <a:p>
-            <a:pPr marL="342900" indent="-342900">
-              <a:lnSpc>
-                <a:spcPct val="140000"/>
-              </a:lnSpc>
-              <a:buSzPct val="100000"/>
-              <a:buChar char="•"/>
+              <a:t>Newton's Third Law: the rocket pushes gas down, the gas pushes the rocket up.</a:t>
+            </a:r>
+            <a:endParaRPr lang="en-US" sz="1400" dirty="0"/>
+          </a:p>
+        </p:txBody>
+      </p:sp>
+      <p:sp>
+        <p:nvSpPr>
+          <p:cNvPr id="7" name="Shape 5"/>
+          <p:cNvSpPr/>
+          <p:nvPr/>
+        </p:nvSpPr>
+        <p:spPr>
+          <a:xfrm>
+            <a:off x="548640" y="3200400"/>
+            <a:ext cx="7315200" cy="1645920"/>
+          </a:xfrm>
+          <a:prstGeom prst="rect">
+            <a:avLst/>
+          </a:prstGeom>
+          <a:solidFill>
+            <a:srgbClr val="243660"/>
+          </a:solidFill>
+          <a:ln/>
+        </p:spPr>
+      </p:sp>
+      <p:sp>
+        <p:nvSpPr>
+          <p:cNvPr id="8" name="Text 6"/>
+          <p:cNvSpPr/>
+          <p:nvPr/>
+        </p:nvSpPr>
+        <p:spPr>
+          <a:xfrm>
+            <a:off x="731520" y="3246120"/>
+            <a:ext cx="3657600" cy="320040"/>
+          </a:xfrm>
+          <a:prstGeom prst="rect">
+            <a:avLst/>
+          </a:prstGeom>
+          <a:noFill/>
+          <a:ln/>
+        </p:spPr>
+        <p:txBody>
+          <a:bodyPr wrap="square" rtlCol="0" anchor="ctr"/>
+          <a:lstStyle/>
+          <a:p>
+            <a:pPr indent="0" marL="0">
+              <a:buNone/>
             </a:pPr>
             <a:r>
-              <a:rPr lang="en-US" sz="1500" dirty="0">
+              <a:rPr lang="en-US" sz="1100" b="1" spc="200" kern="0" dirty="0">
                 <a:solidFill>
-                  <a:srgbClr val="3D3A36"/>
+                  <a:srgbClr val="C8372D"/>
                 </a:solidFill>
                 <a:latin typeface="Calibri" pitchFamily="34" charset="0"/>
                 <a:ea typeface="Calibri" pitchFamily="34" charset="-122"/>
                 <a:cs typeface="Calibri" pitchFamily="34" charset="-120"/>
               </a:rPr>
-              <a:t>This is also called the Law of Inertia.</a:t>
-            </a:r>
-            <a:endParaRPr lang="en-US" sz="1500" dirty="0"/>
-          </a:p>
+              <a:t>Think — Pair — Share</a:t>
+            </a:r>
+            <a:endParaRPr lang="en-US" sz="1100" dirty="0"/>
+          </a:p>
+        </p:txBody>
+      </p:sp>
+      <p:sp>
+        <p:nvSpPr>
+          <p:cNvPr id="9" name="Text 7"/>
+          <p:cNvSpPr/>
+          <p:nvPr/>
+        </p:nvSpPr>
+        <p:spPr>
+          <a:xfrm>
+            <a:off x="731520" y="3566160"/>
+            <a:ext cx="6949440" cy="1188720"/>
+          </a:xfrm>
+          <a:prstGeom prst="rect">
+            <a:avLst/>
+          </a:prstGeom>
+          <a:noFill/>
+          <a:ln/>
+        </p:spPr>
+        <p:txBody>
+          <a:bodyPr wrap="square" rtlCol="0" anchor="ctr"/>
+          <a:lstStyle/>
           <a:p>
             <a:pPr marL="342900" indent="-342900">
-              <a:lnSpc>
-                <a:spcPct val="140000"/>
-              </a:lnSpc>
+              <a:spcAft>
+                <a:spcPts val="600"/>
+              </a:spcAft>
               <a:buSzPct val="100000"/>
               <a:buChar char="•"/>
             </a:pPr>
             <a:r>
-              <a:rPr lang="en-US" sz="1500" dirty="0">
+              <a:rPr lang="en-US" sz="1400" dirty="0">
                 <a:solidFill>
-                  <a:srgbClr val="3D3A36"/>
+                  <a:srgbClr val="E5E2DC"/>
                 </a:solidFill>
                 <a:latin typeface="Calibri" pitchFamily="34" charset="0"/>
                 <a:ea typeface="Calibri" pitchFamily="34" charset="-122"/>
                 <a:cs typeface="Calibri" pitchFamily="34" charset="-120"/>
               </a:rPr>
-              <a:t>Inertia = resistance to change in motion.</a:t>
-            </a:r>
-            <a:endParaRPr lang="en-US" sz="1500" dirty="0"/>
+              <a:t>What forces act on a rocket at launch?</a:t>
+            </a:r>
+            <a:endParaRPr lang="en-US" sz="1400" dirty="0"/>
+          </a:p>
+          <a:p>
+            <a:pPr marL="342900" indent="-342900">
+              <a:spcAft>
+                <a:spcPts val="600"/>
+              </a:spcAft>
+              <a:buSzPct val="100000"/>
+              <a:buChar char="•"/>
+            </a:pPr>
+            <a:r>
+              <a:rPr lang="en-US" sz="1400" dirty="0">
+                <a:solidFill>
+                  <a:srgbClr val="E5E2DC"/>
+                </a:solidFill>
+                <a:latin typeface="Calibri" pitchFamily="34" charset="0"/>
+                <a:ea typeface="Calibri" pitchFamily="34" charset="-122"/>
+                <a:cs typeface="Calibri" pitchFamily="34" charset="-120"/>
+              </a:rPr>
+              <a:t>Why does a heavier rocket need more fuel?</a:t>
+            </a:r>
+            <a:endParaRPr lang="en-US" sz="1400" dirty="0"/>
+          </a:p>
+          <a:p>
+            <a:pPr marL="342900" indent="-342900">
+              <a:spcAft>
+                <a:spcPts val="600"/>
+              </a:spcAft>
+              <a:buSzPct val="100000"/>
+              <a:buChar char="•"/>
+            </a:pPr>
+            <a:r>
+              <a:rPr lang="en-US" sz="1400" dirty="0">
+                <a:solidFill>
+                  <a:srgbClr val="E5E2DC"/>
+                </a:solidFill>
+                <a:latin typeface="Calibri" pitchFamily="34" charset="0"/>
+                <a:ea typeface="Calibri" pitchFamily="34" charset="-122"/>
+                <a:cs typeface="Calibri" pitchFamily="34" charset="-120"/>
+              </a:rPr>
+              <a:t>What would happen if there were no gravity?</a:t>
+            </a:r>
+            <a:endParaRPr lang="en-US" sz="1400" dirty="0"/>
           </a:p>
         </p:txBody>
       </p:sp>
@@ -1730,6 +2062,13 @@
 <file path=ppt/slides/slide3.xml><?xml version="1.0" encoding="utf-8"?>
 <p:sld xmlns:a="http://schemas.openxmlformats.org/drawingml/2006/main" xmlns:r="http://schemas.openxmlformats.org/officeDocument/2006/relationships" xmlns:p="http://schemas.openxmlformats.org/presentationml/2006/main">
   <p:cSld name="Slide 3">
+    <p:bg>
+      <p:bgPr>
+        <a:solidFill>
+          <a:srgbClr val="FAF8F5"/>
+        </a:solidFill>
+      </p:bgPr>
+    </p:bg>
     <p:spTree>
       <p:nvGrpSpPr>
         <p:cNvPr id="1" name=""/>
@@ -1753,13 +2092,13 @@
         <p:spPr>
           <a:xfrm>
             <a:off x="0" y="0"/>
-            <a:ext cx="9144000" cy="5143500"/>
+            <a:ext cx="9144000" cy="822960"/>
           </a:xfrm>
           <a:prstGeom prst="rect">
             <a:avLst/>
           </a:prstGeom>
           <a:solidFill>
-            <a:srgbClr val="FAF8F5"/>
+            <a:srgbClr val="FFFFFF"/>
           </a:solidFill>
           <a:ln/>
         </p:spPr>
@@ -1772,8 +2111,8 @@
         </p:nvSpPr>
         <p:spPr>
           <a:xfrm>
-            <a:off x="0" y="0"/>
-            <a:ext cx="9144000" cy="54864"/>
+            <a:off x="0" y="795528"/>
+            <a:ext cx="9144000" cy="27432"/>
           </a:xfrm>
           <a:prstGeom prst="rect">
             <a:avLst/>
@@ -1792,7 +2131,7 @@
         </p:nvSpPr>
         <p:spPr>
           <a:xfrm>
-            <a:off x="640080" y="320040"/>
+            <a:off x="640080" y="91440"/>
             <a:ext cx="7863840" cy="640080"/>
           </a:xfrm>
           <a:prstGeom prst="rect">
@@ -1809,7 +2148,7 @@
               <a:buNone/>
             </a:pPr>
             <a:r>
-              <a:rPr lang="en-US" sz="2600" b="1" dirty="0">
+              <a:rPr lang="en-US" sz="2200" b="1" dirty="0">
                 <a:solidFill>
                   <a:srgbClr val="1B2A4A"/>
                 </a:solidFill>
@@ -1817,9 +2156,9 @@
                 <a:ea typeface="Georgia" pitchFamily="34" charset="-122"/>
                 <a:cs typeface="Georgia" pitchFamily="34" charset="-120"/>
               </a:rPr>
-              <a:t>Newton's Second Law: F = ma</a:t>
-            </a:r>
-            <a:endParaRPr lang="en-US" sz="2600" dirty="0"/>
+              <a:t>Newton's First Law</a:t>
+            </a:r>
+            <a:endParaRPr lang="en-US" sz="2200" dirty="0"/>
           </a:p>
         </p:txBody>
       </p:sp>
@@ -1831,8 +2170,8 @@
         </p:nvSpPr>
         <p:spPr>
           <a:xfrm>
-            <a:off x="640080" y="1188720"/>
-            <a:ext cx="7863840" cy="3200400"/>
+            <a:off x="640080" y="1005840"/>
+            <a:ext cx="7863840" cy="2926080"/>
           </a:xfrm>
           <a:prstGeom prst="rect">
             <a:avLst/>
@@ -1841,18 +2180,18 @@
           <a:ln/>
         </p:spPr>
         <p:txBody>
-          <a:bodyPr wrap="square" rtlCol="0" anchor="t"/>
+          <a:bodyPr wrap="square" rtlCol="0" anchor="ctr"/>
           <a:lstStyle/>
           <a:p>
             <a:pPr marL="342900" indent="-342900">
-              <a:lnSpc>
-                <a:spcPct val="140000"/>
-              </a:lnSpc>
+              <a:spcAft>
+                <a:spcPts val="800"/>
+              </a:spcAft>
               <a:buSzPct val="100000"/>
               <a:buChar char="•"/>
             </a:pPr>
             <a:r>
-              <a:rPr lang="en-US" sz="1500" dirty="0">
+              <a:rPr lang="en-US" sz="1600" dirty="0">
                 <a:solidFill>
                   <a:srgbClr val="3D3A36"/>
                 </a:solidFill>
@@ -1860,20 +2199,20 @@
                 <a:ea typeface="Calibri" pitchFamily="34" charset="-122"/>
                 <a:cs typeface="Calibri" pitchFamily="34" charset="-120"/>
               </a:rPr>
-              <a:t>Force = mass × acceleration.</a:t>
-            </a:r>
-            <a:endParaRPr lang="en-US" sz="1500" dirty="0"/>
+              <a:t>An object stays at rest or moves at constant speed UNLESS an unbalanced force acts.</a:t>
+            </a:r>
+            <a:endParaRPr lang="en-US" sz="1600" dirty="0"/>
           </a:p>
           <a:p>
             <a:pPr marL="342900" indent="-342900">
-              <a:lnSpc>
-                <a:spcPct val="140000"/>
-              </a:lnSpc>
+              <a:spcAft>
+                <a:spcPts val="800"/>
+              </a:spcAft>
               <a:buSzPct val="100000"/>
               <a:buChar char="•"/>
             </a:pPr>
             <a:r>
-              <a:rPr lang="en-US" sz="1500" dirty="0">
+              <a:rPr lang="en-US" sz="1600" dirty="0">
                 <a:solidFill>
                   <a:srgbClr val="3D3A36"/>
                 </a:solidFill>
@@ -1881,20 +2220,20 @@
                 <a:ea typeface="Calibri" pitchFamily="34" charset="-122"/>
                 <a:cs typeface="Calibri" pitchFamily="34" charset="-120"/>
               </a:rPr>
-              <a:t>Bigger force → more acceleration.</a:t>
-            </a:r>
-            <a:endParaRPr lang="en-US" sz="1500" dirty="0"/>
+              <a:t>Also called the Law of Inertia.</a:t>
+            </a:r>
+            <a:endParaRPr lang="en-US" sz="1600" dirty="0"/>
           </a:p>
           <a:p>
             <a:pPr marL="342900" indent="-342900">
-              <a:lnSpc>
-                <a:spcPct val="140000"/>
-              </a:lnSpc>
+              <a:spcAft>
+                <a:spcPts val="800"/>
+              </a:spcAft>
               <a:buSzPct val="100000"/>
               <a:buChar char="•"/>
             </a:pPr>
             <a:r>
-              <a:rPr lang="en-US" sz="1500" dirty="0">
+              <a:rPr lang="en-US" sz="1600" dirty="0">
                 <a:solidFill>
                   <a:srgbClr val="3D3A36"/>
                 </a:solidFill>
@@ -1902,20 +2241,20 @@
                 <a:ea typeface="Calibri" pitchFamily="34" charset="-122"/>
                 <a:cs typeface="Calibri" pitchFamily="34" charset="-120"/>
               </a:rPr>
-              <a:t>Bigger mass → less acceleration (harder to move).</a:t>
-            </a:r>
-            <a:endParaRPr lang="en-US" sz="1500" dirty="0"/>
+              <a:t>No net force → no change in motion.</a:t>
+            </a:r>
+            <a:endParaRPr lang="en-US" sz="1600" dirty="0"/>
           </a:p>
           <a:p>
             <a:pPr marL="342900" indent="-342900">
-              <a:lnSpc>
-                <a:spcPct val="140000"/>
-              </a:lnSpc>
+              <a:spcAft>
+                <a:spcPts val="800"/>
+              </a:spcAft>
               <a:buSzPct val="100000"/>
               <a:buChar char="•"/>
             </a:pPr>
             <a:r>
-              <a:rPr lang="en-US" sz="1500" dirty="0">
+              <a:rPr lang="en-US" sz="1600" dirty="0">
                 <a:solidFill>
                   <a:srgbClr val="3D3A36"/>
                 </a:solidFill>
@@ -1923,9 +2262,9 @@
                 <a:ea typeface="Calibri" pitchFamily="34" charset="-122"/>
                 <a:cs typeface="Calibri" pitchFamily="34" charset="-120"/>
               </a:rPr>
-              <a:t>Units: Force (N), mass (kg), acceleration (m/s²).</a:t>
-            </a:r>
-            <a:endParaRPr lang="en-US" sz="1500" dirty="0"/>
+              <a:t>Example: a hockey puck slides on ice for a long time.</a:t>
+            </a:r>
+            <a:endParaRPr lang="en-US" sz="1600" dirty="0"/>
           </a:p>
         </p:txBody>
       </p:sp>
@@ -1937,30 +2276,55 @@
         </p:nvSpPr>
         <p:spPr>
           <a:xfrm>
-            <a:off x="640080" y="4206240"/>
-            <a:ext cx="7863840" cy="640080"/>
-          </a:xfrm>
-          <a:prstGeom prst="roundRect">
-            <a:avLst>
-              <a:gd name="adj" fmla="val 11429"/>
-            </a:avLst>
+            <a:off x="640080" y="4114800"/>
+            <a:ext cx="7863840" cy="731520"/>
+          </a:xfrm>
+          <a:prstGeom prst="rect">
+            <a:avLst/>
           </a:prstGeom>
           <a:solidFill>
             <a:srgbClr val="E8F5F3"/>
           </a:solidFill>
           <a:ln/>
-        </p:spPr>
-      </p:sp>
-      <p:sp>
-        <p:nvSpPr>
-          <p:cNvPr id="7" name="Text 5"/>
-          <p:cNvSpPr/>
-          <p:nvPr/>
-        </p:nvSpPr>
-        <p:spPr>
-          <a:xfrm>
-            <a:off x="822960" y="4251960"/>
-            <a:ext cx="7498080" cy="548640"/>
+          <a:effectLst>
+            <a:outerShdw sx="100000" sy="100000" kx="0" ky="0" algn="bl" rotWithShape="0" blurRad="76200" dist="25400" dir="8100000">
+              <a:srgbClr val="000000">
+                <a:alpha val="12000"/>
+              </a:srgbClr>
+            </a:outerShdw>
+          </a:effectLst>
+        </p:spPr>
+      </p:sp>
+      <p:sp>
+        <p:nvSpPr>
+          <p:cNvPr id="7" name="Shape 5"/>
+          <p:cNvSpPr/>
+          <p:nvPr/>
+        </p:nvSpPr>
+        <p:spPr>
+          <a:xfrm>
+            <a:off x="640080" y="4114800"/>
+            <a:ext cx="64008" cy="731520"/>
+          </a:xfrm>
+          <a:prstGeom prst="rect">
+            <a:avLst/>
+          </a:prstGeom>
+          <a:solidFill>
+            <a:srgbClr val="C8372D"/>
+          </a:solidFill>
+          <a:ln/>
+        </p:spPr>
+      </p:sp>
+      <p:sp>
+        <p:nvSpPr>
+          <p:cNvPr id="8" name="Text 6"/>
+          <p:cNvSpPr/>
+          <p:nvPr/>
+        </p:nvSpPr>
+        <p:spPr>
+          <a:xfrm>
+            <a:off x="914400" y="4160520"/>
+            <a:ext cx="7406640" cy="640080"/>
           </a:xfrm>
           <a:prstGeom prst="rect">
             <a:avLst/>
@@ -1976,17 +2340,17 @@
               <a:buNone/>
             </a:pPr>
             <a:r>
-              <a:rPr lang="en-US" sz="1200" i="1" dirty="0">
+              <a:rPr lang="en-US" sz="1300" i="1" dirty="0">
                 <a:solidFill>
-                  <a:srgbClr val="2A9D8F"/>
+                  <a:srgbClr val="3D3A36"/>
                 </a:solidFill>
                 <a:latin typeface="Calibri" pitchFamily="34" charset="0"/>
                 <a:ea typeface="Calibri" pitchFamily="34" charset="-122"/>
                 <a:cs typeface="Calibri" pitchFamily="34" charset="-120"/>
               </a:rPr>
-              <a:t>Example: F = 5 kg × 3 m/s² = 15 N</a:t>
-            </a:r>
-            <a:endParaRPr lang="en-US" sz="1200" dirty="0"/>
+              <a:t>On the German Autobahn (no speed limit sections), a car at constant 200 km/h has balanced forces.</a:t>
+            </a:r>
+            <a:endParaRPr lang="en-US" sz="1300" dirty="0"/>
           </a:p>
         </p:txBody>
       </p:sp>
@@ -2001,6 +2365,13 @@
 <file path=ppt/slides/slide4.xml><?xml version="1.0" encoding="utf-8"?>
 <p:sld xmlns:a="http://schemas.openxmlformats.org/drawingml/2006/main" xmlns:r="http://schemas.openxmlformats.org/officeDocument/2006/relationships" xmlns:p="http://schemas.openxmlformats.org/presentationml/2006/main">
   <p:cSld name="Slide 4">
+    <p:bg>
+      <p:bgPr>
+        <a:solidFill>
+          <a:srgbClr val="FAF8F5"/>
+        </a:solidFill>
+      </p:bgPr>
+    </p:bg>
     <p:spTree>
       <p:nvGrpSpPr>
         <p:cNvPr id="1" name=""/>
@@ -2024,13 +2395,13 @@
         <p:spPr>
           <a:xfrm>
             <a:off x="0" y="0"/>
-            <a:ext cx="9144000" cy="5143500"/>
+            <a:ext cx="9144000" cy="822960"/>
           </a:xfrm>
           <a:prstGeom prst="rect">
             <a:avLst/>
           </a:prstGeom>
           <a:solidFill>
-            <a:srgbClr val="FAF8F5"/>
+            <a:srgbClr val="FFFFFF"/>
           </a:solidFill>
           <a:ln/>
         </p:spPr>
@@ -2043,8 +2414,8 @@
         </p:nvSpPr>
         <p:spPr>
           <a:xfrm>
-            <a:off x="0" y="0"/>
-            <a:ext cx="9144000" cy="54864"/>
+            <a:off x="0" y="795528"/>
+            <a:ext cx="9144000" cy="27432"/>
           </a:xfrm>
           <a:prstGeom prst="rect">
             <a:avLst/>
@@ -2063,7 +2434,7 @@
         </p:nvSpPr>
         <p:spPr>
           <a:xfrm>
-            <a:off x="640080" y="320040"/>
+            <a:off x="640080" y="91440"/>
             <a:ext cx="7863840" cy="640080"/>
           </a:xfrm>
           <a:prstGeom prst="rect">
@@ -2080,7 +2451,7 @@
               <a:buNone/>
             </a:pPr>
             <a:r>
-              <a:rPr lang="en-US" sz="2600" b="1" dirty="0">
+              <a:rPr lang="en-US" sz="2200" b="1" dirty="0">
                 <a:solidFill>
                   <a:srgbClr val="1B2A4A"/>
                 </a:solidFill>
@@ -2088,9 +2459,9 @@
                 <a:ea typeface="Georgia" pitchFamily="34" charset="-122"/>
                 <a:cs typeface="Georgia" pitchFamily="34" charset="-120"/>
               </a:rPr>
-              <a:t>Newton's Third Law</a:t>
-            </a:r>
-            <a:endParaRPr lang="en-US" sz="2600" dirty="0"/>
+              <a:t>Newton's Second Law</a:t>
+            </a:r>
+            <a:endParaRPr lang="en-US" sz="2200" dirty="0"/>
           </a:p>
         </p:txBody>
       </p:sp>
@@ -2102,8 +2473,8 @@
         </p:nvSpPr>
         <p:spPr>
           <a:xfrm>
-            <a:off x="640080" y="1188720"/>
-            <a:ext cx="7863840" cy="3200400"/>
+            <a:off x="640080" y="1005840"/>
+            <a:ext cx="7863840" cy="2926080"/>
           </a:xfrm>
           <a:prstGeom prst="rect">
             <a:avLst/>
@@ -2112,18 +2483,18 @@
           <a:ln/>
         </p:spPr>
         <p:txBody>
-          <a:bodyPr wrap="square" rtlCol="0" anchor="t"/>
+          <a:bodyPr wrap="square" rtlCol="0" anchor="ctr"/>
           <a:lstStyle/>
           <a:p>
             <a:pPr marL="342900" indent="-342900">
-              <a:lnSpc>
-                <a:spcPct val="140000"/>
-              </a:lnSpc>
+              <a:spcAft>
+                <a:spcPts val="800"/>
+              </a:spcAft>
               <a:buSzPct val="100000"/>
               <a:buChar char="•"/>
             </a:pPr>
             <a:r>
-              <a:rPr lang="en-US" sz="1500" dirty="0">
+              <a:rPr lang="en-US" sz="1600" dirty="0">
                 <a:solidFill>
                   <a:srgbClr val="3D3A36"/>
                 </a:solidFill>
@@ -2131,20 +2502,20 @@
                 <a:ea typeface="Calibri" pitchFamily="34" charset="-122"/>
                 <a:cs typeface="Calibri" pitchFamily="34" charset="-120"/>
               </a:rPr>
-              <a:t>Every action has an equal and opposite reaction.</a:t>
-            </a:r>
-            <a:endParaRPr lang="en-US" sz="1500" dirty="0"/>
+              <a:t>Force = Mass × Acceleration (F = ma).</a:t>
+            </a:r>
+            <a:endParaRPr lang="en-US" sz="1600" dirty="0"/>
           </a:p>
           <a:p>
             <a:pPr marL="342900" indent="-342900">
-              <a:lnSpc>
-                <a:spcPct val="140000"/>
-              </a:lnSpc>
+              <a:spcAft>
+                <a:spcPts val="800"/>
+              </a:spcAft>
               <a:buSzPct val="100000"/>
               <a:buChar char="•"/>
             </a:pPr>
             <a:r>
-              <a:rPr lang="en-US" sz="1500" dirty="0">
+              <a:rPr lang="en-US" sz="1600" dirty="0">
                 <a:solidFill>
                   <a:srgbClr val="3D3A36"/>
                 </a:solidFill>
@@ -2152,20 +2523,20 @@
                 <a:ea typeface="Calibri" pitchFamily="34" charset="-122"/>
                 <a:cs typeface="Calibri" pitchFamily="34" charset="-120"/>
               </a:rPr>
-              <a:t>When you push a wall, the wall pushes back with the same force.</a:t>
-            </a:r>
-            <a:endParaRPr lang="en-US" sz="1500" dirty="0"/>
+              <a:t>More force → more acceleration.</a:t>
+            </a:r>
+            <a:endParaRPr lang="en-US" sz="1600" dirty="0"/>
           </a:p>
           <a:p>
             <a:pPr marL="342900" indent="-342900">
-              <a:lnSpc>
-                <a:spcPct val="140000"/>
-              </a:lnSpc>
+              <a:spcAft>
+                <a:spcPts val="800"/>
+              </a:spcAft>
               <a:buSzPct val="100000"/>
               <a:buChar char="•"/>
             </a:pPr>
             <a:r>
-              <a:rPr lang="en-US" sz="1500" dirty="0">
+              <a:rPr lang="en-US" sz="1600" dirty="0">
                 <a:solidFill>
                   <a:srgbClr val="3D3A36"/>
                 </a:solidFill>
@@ -2173,20 +2544,20 @@
                 <a:ea typeface="Calibri" pitchFamily="34" charset="-122"/>
                 <a:cs typeface="Calibri" pitchFamily="34" charset="-120"/>
               </a:rPr>
-              <a:t>A swimmer pushes water backwards → water pushes swimmer forwards.</a:t>
-            </a:r>
-            <a:endParaRPr lang="en-US" sz="1500" dirty="0"/>
+              <a:t>More mass → less acceleration.</a:t>
+            </a:r>
+            <a:endParaRPr lang="en-US" sz="1600" dirty="0"/>
           </a:p>
           <a:p>
             <a:pPr marL="342900" indent="-342900">
-              <a:lnSpc>
-                <a:spcPct val="140000"/>
-              </a:lnSpc>
+              <a:spcAft>
+                <a:spcPts val="800"/>
+              </a:spcAft>
               <a:buSzPct val="100000"/>
               <a:buChar char="•"/>
             </a:pPr>
             <a:r>
-              <a:rPr lang="en-US" sz="1500" dirty="0">
+              <a:rPr lang="en-US" sz="1600" dirty="0">
                 <a:solidFill>
                   <a:srgbClr val="3D3A36"/>
                 </a:solidFill>
@@ -2194,9 +2565,95 @@
                 <a:ea typeface="Calibri" pitchFamily="34" charset="-122"/>
                 <a:cs typeface="Calibri" pitchFamily="34" charset="-120"/>
               </a:rPr>
-              <a:t>The forces act on DIFFERENT objects — they don't cancel out.</a:t>
-            </a:r>
-            <a:endParaRPr lang="en-US" sz="1500" dirty="0"/>
+              <a:t>This is why a truck is harder to push than a bicycle.</a:t>
+            </a:r>
+            <a:endParaRPr lang="en-US" sz="1600" dirty="0"/>
+          </a:p>
+        </p:txBody>
+      </p:sp>
+      <p:sp>
+        <p:nvSpPr>
+          <p:cNvPr id="6" name="Shape 4"/>
+          <p:cNvSpPr/>
+          <p:nvPr/>
+        </p:nvSpPr>
+        <p:spPr>
+          <a:xfrm>
+            <a:off x="640080" y="4114800"/>
+            <a:ext cx="7863840" cy="731520"/>
+          </a:xfrm>
+          <a:prstGeom prst="rect">
+            <a:avLst/>
+          </a:prstGeom>
+          <a:solidFill>
+            <a:srgbClr val="E8F5F3"/>
+          </a:solidFill>
+          <a:ln/>
+          <a:effectLst>
+            <a:outerShdw sx="100000" sy="100000" kx="0" ky="0" algn="bl" rotWithShape="0" blurRad="76200" dist="25400" dir="8100000">
+              <a:srgbClr val="000000">
+                <a:alpha val="12000"/>
+              </a:srgbClr>
+            </a:outerShdw>
+          </a:effectLst>
+        </p:spPr>
+      </p:sp>
+      <p:sp>
+        <p:nvSpPr>
+          <p:cNvPr id="7" name="Shape 5"/>
+          <p:cNvSpPr/>
+          <p:nvPr/>
+        </p:nvSpPr>
+        <p:spPr>
+          <a:xfrm>
+            <a:off x="640080" y="4114800"/>
+            <a:ext cx="64008" cy="731520"/>
+          </a:xfrm>
+          <a:prstGeom prst="rect">
+            <a:avLst/>
+          </a:prstGeom>
+          <a:solidFill>
+            <a:srgbClr val="C8372D"/>
+          </a:solidFill>
+          <a:ln/>
+        </p:spPr>
+      </p:sp>
+      <p:sp>
+        <p:nvSpPr>
+          <p:cNvPr id="8" name="Text 6"/>
+          <p:cNvSpPr/>
+          <p:nvPr/>
+        </p:nvSpPr>
+        <p:spPr>
+          <a:xfrm>
+            <a:off x="914400" y="4160520"/>
+            <a:ext cx="7406640" cy="640080"/>
+          </a:xfrm>
+          <a:prstGeom prst="rect">
+            <a:avLst/>
+          </a:prstGeom>
+          <a:noFill/>
+          <a:ln/>
+        </p:spPr>
+        <p:txBody>
+          <a:bodyPr wrap="square" rtlCol="0" anchor="ctr"/>
+          <a:lstStyle/>
+          <a:p>
+            <a:pPr indent="0" marL="0">
+              <a:buNone/>
+            </a:pPr>
+            <a:r>
+              <a:rPr lang="en-US" sz="1300" i="1" dirty="0">
+                <a:solidFill>
+                  <a:srgbClr val="3D3A36"/>
+                </a:solidFill>
+                <a:latin typeface="Calibri" pitchFamily="34" charset="0"/>
+                <a:ea typeface="Calibri" pitchFamily="34" charset="-122"/>
+                <a:cs typeface="Calibri" pitchFamily="34" charset="-120"/>
+              </a:rPr>
+              <a:t>F is in Newtons, m is in kilograms, a is in m/s².</a:t>
+            </a:r>
+            <a:endParaRPr lang="en-US" sz="1300" dirty="0"/>
           </a:p>
         </p:txBody>
       </p:sp>
@@ -2211,6 +2668,13 @@
 <file path=ppt/slides/slide5.xml><?xml version="1.0" encoding="utf-8"?>
 <p:sld xmlns:a="http://schemas.openxmlformats.org/drawingml/2006/main" xmlns:r="http://schemas.openxmlformats.org/officeDocument/2006/relationships" xmlns:p="http://schemas.openxmlformats.org/presentationml/2006/main">
   <p:cSld name="Slide 5">
+    <p:bg>
+      <p:bgPr>
+        <a:solidFill>
+          <a:srgbClr val="FAF8F5"/>
+        </a:solidFill>
+      </p:bgPr>
+    </p:bg>
     <p:spTree>
       <p:nvGrpSpPr>
         <p:cNvPr id="1" name=""/>
@@ -2234,13 +2698,13 @@
         <p:spPr>
           <a:xfrm>
             <a:off x="0" y="0"/>
-            <a:ext cx="9144000" cy="5143500"/>
+            <a:ext cx="9144000" cy="822960"/>
           </a:xfrm>
           <a:prstGeom prst="rect">
             <a:avLst/>
           </a:prstGeom>
           <a:solidFill>
-            <a:srgbClr val="FAF8F5"/>
+            <a:srgbClr val="FFFFFF"/>
           </a:solidFill>
           <a:ln/>
         </p:spPr>
@@ -2253,8 +2717,8 @@
         </p:nvSpPr>
         <p:spPr>
           <a:xfrm>
-            <a:off x="0" y="0"/>
-            <a:ext cx="9144000" cy="54864"/>
+            <a:off x="0" y="795528"/>
+            <a:ext cx="9144000" cy="27432"/>
           </a:xfrm>
           <a:prstGeom prst="rect">
             <a:avLst/>
@@ -2273,7 +2737,7 @@
         </p:nvSpPr>
         <p:spPr>
           <a:xfrm>
-            <a:off x="640080" y="320040"/>
+            <a:off x="640080" y="91440"/>
             <a:ext cx="7863840" cy="640080"/>
           </a:xfrm>
           <a:prstGeom prst="rect">
@@ -2290,7 +2754,7 @@
               <a:buNone/>
             </a:pPr>
             <a:r>
-              <a:rPr lang="en-US" sz="2600" b="1" dirty="0">
+              <a:rPr lang="en-US" sz="2200" b="1" dirty="0">
                 <a:solidFill>
                   <a:srgbClr val="1B2A4A"/>
                 </a:solidFill>
@@ -2298,9 +2762,9 @@
                 <a:ea typeface="Georgia" pitchFamily="34" charset="-122"/>
                 <a:cs typeface="Georgia" pitchFamily="34" charset="-120"/>
               </a:rPr>
-              <a:t>Force Diagrams</a:t>
-            </a:r>
-            <a:endParaRPr lang="en-US" sz="2600" dirty="0"/>
+              <a:t>Newton's Third Law</a:t>
+            </a:r>
+            <a:endParaRPr lang="en-US" sz="2200" dirty="0"/>
           </a:p>
         </p:txBody>
       </p:sp>
@@ -2312,8 +2776,8 @@
         </p:nvSpPr>
         <p:spPr>
           <a:xfrm>
-            <a:off x="640080" y="1188720"/>
-            <a:ext cx="7863840" cy="3200400"/>
+            <a:off x="640080" y="1005840"/>
+            <a:ext cx="7863840" cy="2926080"/>
           </a:xfrm>
           <a:prstGeom prst="rect">
             <a:avLst/>
@@ -2322,18 +2786,18 @@
           <a:ln/>
         </p:spPr>
         <p:txBody>
-          <a:bodyPr wrap="square" rtlCol="0" anchor="t"/>
+          <a:bodyPr wrap="square" rtlCol="0" anchor="ctr"/>
           <a:lstStyle/>
           <a:p>
             <a:pPr marL="342900" indent="-342900">
-              <a:lnSpc>
-                <a:spcPct val="140000"/>
-              </a:lnSpc>
+              <a:spcAft>
+                <a:spcPts val="800"/>
+              </a:spcAft>
               <a:buSzPct val="100000"/>
               <a:buChar char="•"/>
             </a:pPr>
             <a:r>
-              <a:rPr lang="en-US" sz="1500" dirty="0">
+              <a:rPr lang="en-US" sz="1600" dirty="0">
                 <a:solidFill>
                   <a:srgbClr val="3D3A36"/>
                 </a:solidFill>
@@ -2341,20 +2805,20 @@
                 <a:ea typeface="Calibri" pitchFamily="34" charset="-122"/>
                 <a:cs typeface="Calibri" pitchFamily="34" charset="-120"/>
               </a:rPr>
-              <a:t>Show all forces acting on an object as arrows.</a:t>
-            </a:r>
-            <a:endParaRPr lang="en-US" sz="1500" dirty="0"/>
+              <a:t>For every action, there is an equal and opposite reaction.</a:t>
+            </a:r>
+            <a:endParaRPr lang="en-US" sz="1600" dirty="0"/>
           </a:p>
           <a:p>
             <a:pPr marL="342900" indent="-342900">
-              <a:lnSpc>
-                <a:spcPct val="140000"/>
-              </a:lnSpc>
+              <a:spcAft>
+                <a:spcPts val="800"/>
+              </a:spcAft>
               <a:buSzPct val="100000"/>
               <a:buChar char="•"/>
             </a:pPr>
             <a:r>
-              <a:rPr lang="en-US" sz="1500" dirty="0">
+              <a:rPr lang="en-US" sz="1600" dirty="0">
                 <a:solidFill>
                   <a:srgbClr val="3D3A36"/>
                 </a:solidFill>
@@ -2362,20 +2826,20 @@
                 <a:ea typeface="Calibri" pitchFamily="34" charset="-122"/>
                 <a:cs typeface="Calibri" pitchFamily="34" charset="-120"/>
               </a:rPr>
-              <a:t>Arrow length = size of force. Arrow direction = direction of force.</a:t>
-            </a:r>
-            <a:endParaRPr lang="en-US" sz="1500" dirty="0"/>
+              <a:t>Forces always come in PAIRS.</a:t>
+            </a:r>
+            <a:endParaRPr lang="en-US" sz="1600" dirty="0"/>
           </a:p>
           <a:p>
             <a:pPr marL="342900" indent="-342900">
-              <a:lnSpc>
-                <a:spcPct val="140000"/>
-              </a:lnSpc>
+              <a:spcAft>
+                <a:spcPts val="800"/>
+              </a:spcAft>
               <a:buSzPct val="100000"/>
               <a:buChar char="•"/>
             </a:pPr>
             <a:r>
-              <a:rPr lang="en-US" sz="1500" dirty="0">
+              <a:rPr lang="en-US" sz="1600" dirty="0">
                 <a:solidFill>
                   <a:srgbClr val="3D3A36"/>
                 </a:solidFill>
@@ -2383,20 +2847,20 @@
                 <a:ea typeface="Calibri" pitchFamily="34" charset="-122"/>
                 <a:cs typeface="Calibri" pitchFamily="34" charset="-120"/>
               </a:rPr>
-              <a:t>If arrows are equal and opposite → balanced → no acceleration.</a:t>
-            </a:r>
-            <a:endParaRPr lang="en-US" sz="1500" dirty="0"/>
+              <a:t>Push a wall → wall pushes back equally.</a:t>
+            </a:r>
+            <a:endParaRPr lang="en-US" sz="1600" dirty="0"/>
           </a:p>
           <a:p>
             <a:pPr marL="342900" indent="-342900">
-              <a:lnSpc>
-                <a:spcPct val="140000"/>
-              </a:lnSpc>
+              <a:spcAft>
+                <a:spcPts val="800"/>
+              </a:spcAft>
               <a:buSzPct val="100000"/>
               <a:buChar char="•"/>
             </a:pPr>
             <a:r>
-              <a:rPr lang="en-US" sz="1500" dirty="0">
+              <a:rPr lang="en-US" sz="1600" dirty="0">
                 <a:solidFill>
                   <a:srgbClr val="3D3A36"/>
                 </a:solidFill>
@@ -2404,9 +2868,116 @@
                 <a:ea typeface="Calibri" pitchFamily="34" charset="-122"/>
                 <a:cs typeface="Calibri" pitchFamily="34" charset="-120"/>
               </a:rPr>
-              <a:t>If one arrow is longer → unbalanced → object accelerates that way.</a:t>
-            </a:r>
-            <a:endParaRPr lang="en-US" sz="1500" dirty="0"/>
+              <a:t>Rocket pushes gas down → gas pushes rocket up.</a:t>
+            </a:r>
+            <a:endParaRPr lang="en-US" sz="1600" dirty="0"/>
+          </a:p>
+          <a:p>
+            <a:pPr marL="342900" indent="-342900">
+              <a:spcAft>
+                <a:spcPts val="800"/>
+              </a:spcAft>
+              <a:buSzPct val="100000"/>
+              <a:buChar char="•"/>
+            </a:pPr>
+            <a:r>
+              <a:rPr lang="en-US" sz="1600" dirty="0">
+                <a:solidFill>
+                  <a:srgbClr val="3D3A36"/>
+                </a:solidFill>
+                <a:latin typeface="Calibri" pitchFamily="34" charset="0"/>
+                <a:ea typeface="Calibri" pitchFamily="34" charset="-122"/>
+                <a:cs typeface="Calibri" pitchFamily="34" charset="-120"/>
+              </a:rPr>
+              <a:t>The two forces act on DIFFERENT objects.</a:t>
+            </a:r>
+            <a:endParaRPr lang="en-US" sz="1600" dirty="0"/>
+          </a:p>
+        </p:txBody>
+      </p:sp>
+      <p:sp>
+        <p:nvSpPr>
+          <p:cNvPr id="6" name="Shape 4"/>
+          <p:cNvSpPr/>
+          <p:nvPr/>
+        </p:nvSpPr>
+        <p:spPr>
+          <a:xfrm>
+            <a:off x="640080" y="4114800"/>
+            <a:ext cx="7863840" cy="731520"/>
+          </a:xfrm>
+          <a:prstGeom prst="rect">
+            <a:avLst/>
+          </a:prstGeom>
+          <a:solidFill>
+            <a:srgbClr val="E8F5F3"/>
+          </a:solidFill>
+          <a:ln/>
+          <a:effectLst>
+            <a:outerShdw sx="100000" sy="100000" kx="0" ky="0" algn="bl" rotWithShape="0" blurRad="76200" dist="25400" dir="8100000">
+              <a:srgbClr val="000000">
+                <a:alpha val="12000"/>
+              </a:srgbClr>
+            </a:outerShdw>
+          </a:effectLst>
+        </p:spPr>
+      </p:sp>
+      <p:sp>
+        <p:nvSpPr>
+          <p:cNvPr id="7" name="Shape 5"/>
+          <p:cNvSpPr/>
+          <p:nvPr/>
+        </p:nvSpPr>
+        <p:spPr>
+          <a:xfrm>
+            <a:off x="640080" y="4114800"/>
+            <a:ext cx="64008" cy="731520"/>
+          </a:xfrm>
+          <a:prstGeom prst="rect">
+            <a:avLst/>
+          </a:prstGeom>
+          <a:solidFill>
+            <a:srgbClr val="C8372D"/>
+          </a:solidFill>
+          <a:ln/>
+        </p:spPr>
+      </p:sp>
+      <p:sp>
+        <p:nvSpPr>
+          <p:cNvPr id="8" name="Text 6"/>
+          <p:cNvSpPr/>
+          <p:nvPr/>
+        </p:nvSpPr>
+        <p:spPr>
+          <a:xfrm>
+            <a:off x="914400" y="4160520"/>
+            <a:ext cx="7406640" cy="640080"/>
+          </a:xfrm>
+          <a:prstGeom prst="rect">
+            <a:avLst/>
+          </a:prstGeom>
+          <a:noFill/>
+          <a:ln/>
+        </p:spPr>
+        <p:txBody>
+          <a:bodyPr wrap="square" rtlCol="0" anchor="ctr"/>
+          <a:lstStyle/>
+          <a:p>
+            <a:pPr indent="0" marL="0">
+              <a:buNone/>
+            </a:pPr>
+            <a:r>
+              <a:rPr lang="en-US" sz="1300" i="1" dirty="0">
+                <a:solidFill>
+                  <a:srgbClr val="3D3A36"/>
+                </a:solidFill>
+                <a:latin typeface="Calibri" pitchFamily="34" charset="0"/>
+                <a:ea typeface="Calibri" pitchFamily="34" charset="-122"/>
+                <a:cs typeface="Calibri" pitchFamily="34" charset="-120"/>
+              </a:rPr>
+              <a:t>China's space programme (CNSA) relies on Newton's Third Law for every launch from Wenchang.</a:t>
+            </a:r>
+            <a:endParaRPr lang="en-US" sz="1300" dirty="0"/>
           </a:p>
         </p:txBody>
       </p:sp>
@@ -2421,6 +2992,13 @@
 <file path=ppt/slides/slide6.xml><?xml version="1.0" encoding="utf-8"?>
 <p:sld xmlns:a="http://schemas.openxmlformats.org/drawingml/2006/main" xmlns:r="http://schemas.openxmlformats.org/officeDocument/2006/relationships" xmlns:p="http://schemas.openxmlformats.org/presentationml/2006/main">
   <p:cSld name="Slide 6">
+    <p:bg>
+      <p:bgPr>
+        <a:solidFill>
+          <a:srgbClr val="FAF8F5"/>
+        </a:solidFill>
+      </p:bgPr>
+    </p:bg>
     <p:spTree>
       <p:nvGrpSpPr>
         <p:cNvPr id="1" name=""/>
@@ -2444,6 +3022,1580 @@
         <p:spPr>
           <a:xfrm>
             <a:off x="0" y="0"/>
+            <a:ext cx="9144000" cy="822960"/>
+          </a:xfrm>
+          <a:prstGeom prst="rect">
+            <a:avLst/>
+          </a:prstGeom>
+          <a:solidFill>
+            <a:srgbClr val="FFFFFF"/>
+          </a:solidFill>
+          <a:ln/>
+        </p:spPr>
+      </p:sp>
+      <p:sp>
+        <p:nvSpPr>
+          <p:cNvPr id="3" name="Shape 1"/>
+          <p:cNvSpPr/>
+          <p:nvPr/>
+        </p:nvSpPr>
+        <p:spPr>
+          <a:xfrm>
+            <a:off x="0" y="795528"/>
+            <a:ext cx="9144000" cy="27432"/>
+          </a:xfrm>
+          <a:prstGeom prst="rect">
+            <a:avLst/>
+          </a:prstGeom>
+          <a:solidFill>
+            <a:srgbClr val="C8372D"/>
+          </a:solidFill>
+          <a:ln/>
+        </p:spPr>
+      </p:sp>
+      <p:sp>
+        <p:nvSpPr>
+          <p:cNvPr id="4" name="Text 2"/>
+          <p:cNvSpPr/>
+          <p:nvPr/>
+        </p:nvSpPr>
+        <p:spPr>
+          <a:xfrm>
+            <a:off x="640080" y="91440"/>
+            <a:ext cx="7863840" cy="640080"/>
+          </a:xfrm>
+          <a:prstGeom prst="rect">
+            <a:avLst/>
+          </a:prstGeom>
+          <a:noFill/>
+          <a:ln/>
+        </p:spPr>
+        <p:txBody>
+          <a:bodyPr wrap="square" lIns="0" tIns="0" rIns="0" bIns="0" rtlCol="0" anchor="ctr"/>
+          <a:lstStyle/>
+          <a:p>
+            <a:pPr indent="0" marL="0">
+              <a:buNone/>
+            </a:pPr>
+            <a:r>
+              <a:rPr lang="en-US" sz="2200" b="1" dirty="0">
+                <a:solidFill>
+                  <a:srgbClr val="1B2A4A"/>
+                </a:solidFill>
+                <a:latin typeface="Georgia" pitchFamily="34" charset="0"/>
+                <a:ea typeface="Georgia" pitchFamily="34" charset="-122"/>
+                <a:cs typeface="Georgia" pitchFamily="34" charset="-120"/>
+              </a:rPr>
+              <a:t>Newton's Laws Summary</a:t>
+            </a:r>
+            <a:endParaRPr lang="en-US" sz="2200" dirty="0"/>
+          </a:p>
+        </p:txBody>
+      </p:sp>
+      <p:graphicFrame>
+        <p:nvGraphicFramePr>
+          <p:cNvPr id="7" name="Table 0"/>
+          <p:cNvGraphicFramePr>
+            <a:graphicFrameLocks noGrp="1"/>
+          </p:cNvGraphicFramePr>
+          <p:nvPr>
+            <p:extLst>
+              <p:ext uri="{D42A27DB-BD31-4B8C-83A1-F6EECF244321}">
+                <p14:modId xmlns:p14="http://schemas.microsoft.com/office/powerpoint/2010/main" val="1579011935"/>
+              </p:ext>
+            </p:extLst>
+          </p:nvPr>
+        </p:nvGraphicFramePr>
+        <p:xfrm>
+          <a:off x="640080" y="1051560"/>
+          <a:ext cx="7863840" cy="914400"/>
+        </p:xfrm>
+        <a:graphic>
+          <a:graphicData uri="http://schemas.openxmlformats.org/drawingml/2006/table">
+            <a:tbl>
+              <a:tblPr/>
+              <a:tblGrid>
+                <a:gridCol w="2621280"/>
+                <a:gridCol w="2621280"/>
+                <a:gridCol w="2621280"/>
+              </a:tblGrid>
+              <a:tr h="502920">
+                <a:tc>
+                  <a:txBody>
+                    <a:bodyPr/>
+                    <a:lstStyle/>
+                    <a:p>
+                      <a:pPr indent="0" marL="0">
+                        <a:buNone/>
+                      </a:pPr>
+                      <a:r>
+                        <a:rPr lang="en-US" sz="1300" b="1" dirty="0">
+                          <a:solidFill>
+                            <a:srgbClr val="FFFFFF"/>
+                          </a:solidFill>
+                          <a:latin typeface="Calibri" pitchFamily="34" charset="0"/>
+                          <a:ea typeface="Calibri" pitchFamily="34" charset="-122"/>
+                          <a:cs typeface="Calibri" pitchFamily="34" charset="-120"/>
+                        </a:rPr>
+                        <a:t>Law</a:t>
+                      </a:r>
+                      <a:endParaRPr lang="en-US" sz="1300" dirty="0">
+                        <a:latin typeface="Calibri" charset="0"/>
+                        <a:ea typeface="Calibri" charset="0"/>
+                        <a:cs typeface="Calibri" charset="0"/>
+                      </a:endParaRPr>
+                    </a:p>
+                  </a:txBody>
+                  <a:tcPr marL="91440" marR="91440" marT="45720" marB="45720">
+                    <a:lnL w="6350" cap="flat" cmpd="sng" algn="ctr">
+                      <a:solidFill>
+                        <a:srgbClr val="E5E2DC"/>
+                      </a:solidFill>
+                      <a:prstDash val="solid"/>
+                      <a:round/>
+                      <a:headEnd type="none" w="med" len="med"/>
+                      <a:tailEnd type="none" w="med" len="med"/>
+                    </a:lnL>
+                    <a:lnR w="6350" cap="flat" cmpd="sng" algn="ctr">
+                      <a:solidFill>
+                        <a:srgbClr val="E5E2DC"/>
+                      </a:solidFill>
+                      <a:prstDash val="solid"/>
+                      <a:round/>
+                      <a:headEnd type="none" w="med" len="med"/>
+                      <a:tailEnd type="none" w="med" len="med"/>
+                    </a:lnR>
+                    <a:lnT w="6350" cap="flat" cmpd="sng" algn="ctr">
+                      <a:solidFill>
+                        <a:srgbClr val="E5E2DC"/>
+                      </a:solidFill>
+                      <a:prstDash val="solid"/>
+                      <a:round/>
+                      <a:headEnd type="none" w="med" len="med"/>
+                      <a:tailEnd type="none" w="med" len="med"/>
+                    </a:lnT>
+                    <a:lnB w="6350" cap="flat" cmpd="sng" algn="ctr">
+                      <a:solidFill>
+                        <a:srgbClr val="E5E2DC"/>
+                      </a:solidFill>
+                      <a:prstDash val="solid"/>
+                      <a:round/>
+                      <a:headEnd type="none" w="med" len="med"/>
+                      <a:tailEnd type="none" w="med" len="med"/>
+                    </a:lnB>
+                    <a:solidFill>
+                      <a:srgbClr val="C8372D"/>
+                    </a:solidFill>
+                  </a:tcPr>
+                </a:tc>
+                <a:tc>
+                  <a:txBody>
+                    <a:bodyPr/>
+                    <a:lstStyle/>
+                    <a:p>
+                      <a:pPr indent="0" marL="0">
+                        <a:buNone/>
+                      </a:pPr>
+                      <a:r>
+                        <a:rPr lang="en-US" sz="1300" b="1" dirty="0">
+                          <a:solidFill>
+                            <a:srgbClr val="FFFFFF"/>
+                          </a:solidFill>
+                          <a:latin typeface="Calibri" pitchFamily="34" charset="0"/>
+                          <a:ea typeface="Calibri" pitchFamily="34" charset="-122"/>
+                          <a:cs typeface="Calibri" pitchFamily="34" charset="-120"/>
+                        </a:rPr>
+                        <a:t>Key Idea</a:t>
+                      </a:r>
+                      <a:endParaRPr lang="en-US" sz="1300" dirty="0">
+                        <a:latin typeface="Calibri" charset="0"/>
+                        <a:ea typeface="Calibri" charset="0"/>
+                        <a:cs typeface="Calibri" charset="0"/>
+                      </a:endParaRPr>
+                    </a:p>
+                  </a:txBody>
+                  <a:tcPr marL="91440" marR="91440" marT="45720" marB="45720">
+                    <a:lnL w="6350" cap="flat" cmpd="sng" algn="ctr">
+                      <a:solidFill>
+                        <a:srgbClr val="E5E2DC"/>
+                      </a:solidFill>
+                      <a:prstDash val="solid"/>
+                      <a:round/>
+                      <a:headEnd type="none" w="med" len="med"/>
+                      <a:tailEnd type="none" w="med" len="med"/>
+                    </a:lnL>
+                    <a:lnR w="6350" cap="flat" cmpd="sng" algn="ctr">
+                      <a:solidFill>
+                        <a:srgbClr val="E5E2DC"/>
+                      </a:solidFill>
+                      <a:prstDash val="solid"/>
+                      <a:round/>
+                      <a:headEnd type="none" w="med" len="med"/>
+                      <a:tailEnd type="none" w="med" len="med"/>
+                    </a:lnR>
+                    <a:lnT w="6350" cap="flat" cmpd="sng" algn="ctr">
+                      <a:solidFill>
+                        <a:srgbClr val="E5E2DC"/>
+                      </a:solidFill>
+                      <a:prstDash val="solid"/>
+                      <a:round/>
+                      <a:headEnd type="none" w="med" len="med"/>
+                      <a:tailEnd type="none" w="med" len="med"/>
+                    </a:lnT>
+                    <a:lnB w="6350" cap="flat" cmpd="sng" algn="ctr">
+                      <a:solidFill>
+                        <a:srgbClr val="E5E2DC"/>
+                      </a:solidFill>
+                      <a:prstDash val="solid"/>
+                      <a:round/>
+                      <a:headEnd type="none" w="med" len="med"/>
+                      <a:tailEnd type="none" w="med" len="med"/>
+                    </a:lnB>
+                    <a:solidFill>
+                      <a:srgbClr val="C8372D"/>
+                    </a:solidFill>
+                  </a:tcPr>
+                </a:tc>
+                <a:tc>
+                  <a:txBody>
+                    <a:bodyPr/>
+                    <a:lstStyle/>
+                    <a:p>
+                      <a:pPr indent="0" marL="0">
+                        <a:buNone/>
+                      </a:pPr>
+                      <a:r>
+                        <a:rPr lang="en-US" sz="1300" b="1" dirty="0">
+                          <a:solidFill>
+                            <a:srgbClr val="FFFFFF"/>
+                          </a:solidFill>
+                          <a:latin typeface="Calibri" pitchFamily="34" charset="0"/>
+                          <a:ea typeface="Calibri" pitchFamily="34" charset="-122"/>
+                          <a:cs typeface="Calibri" pitchFamily="34" charset="-120"/>
+                        </a:rPr>
+                        <a:t>Equation</a:t>
+                      </a:r>
+                      <a:endParaRPr lang="en-US" sz="1300" dirty="0">
+                        <a:latin typeface="Calibri" charset="0"/>
+                        <a:ea typeface="Calibri" charset="0"/>
+                        <a:cs typeface="Calibri" charset="0"/>
+                      </a:endParaRPr>
+                    </a:p>
+                  </a:txBody>
+                  <a:tcPr marL="91440" marR="91440" marT="45720" marB="45720">
+                    <a:lnL w="6350" cap="flat" cmpd="sng" algn="ctr">
+                      <a:solidFill>
+                        <a:srgbClr val="E5E2DC"/>
+                      </a:solidFill>
+                      <a:prstDash val="solid"/>
+                      <a:round/>
+                      <a:headEnd type="none" w="med" len="med"/>
+                      <a:tailEnd type="none" w="med" len="med"/>
+                    </a:lnL>
+                    <a:lnR w="6350" cap="flat" cmpd="sng" algn="ctr">
+                      <a:solidFill>
+                        <a:srgbClr val="E5E2DC"/>
+                      </a:solidFill>
+                      <a:prstDash val="solid"/>
+                      <a:round/>
+                      <a:headEnd type="none" w="med" len="med"/>
+                      <a:tailEnd type="none" w="med" len="med"/>
+                    </a:lnR>
+                    <a:lnT w="6350" cap="flat" cmpd="sng" algn="ctr">
+                      <a:solidFill>
+                        <a:srgbClr val="E5E2DC"/>
+                      </a:solidFill>
+                      <a:prstDash val="solid"/>
+                      <a:round/>
+                      <a:headEnd type="none" w="med" len="med"/>
+                      <a:tailEnd type="none" w="med" len="med"/>
+                    </a:lnT>
+                    <a:lnB w="6350" cap="flat" cmpd="sng" algn="ctr">
+                      <a:solidFill>
+                        <a:srgbClr val="E5E2DC"/>
+                      </a:solidFill>
+                      <a:prstDash val="solid"/>
+                      <a:round/>
+                      <a:headEnd type="none" w="med" len="med"/>
+                      <a:tailEnd type="none" w="med" len="med"/>
+                    </a:lnB>
+                    <a:solidFill>
+                      <a:srgbClr val="C8372D"/>
+                    </a:solidFill>
+                  </a:tcPr>
+                </a:tc>
+              </a:tr>
+              <a:tr h="502920">
+                <a:tc>
+                  <a:txBody>
+                    <a:bodyPr/>
+                    <a:lstStyle/>
+                    <a:p>
+                      <a:pPr indent="0" marL="0">
+                        <a:buNone/>
+                      </a:pPr>
+                      <a:r>
+                        <a:rPr lang="en-US" sz="1300" dirty="0">
+                          <a:solidFill>
+                            <a:srgbClr val="3D3A36"/>
+                          </a:solidFill>
+                          <a:latin typeface="Calibri" pitchFamily="34" charset="0"/>
+                          <a:ea typeface="Calibri" pitchFamily="34" charset="-122"/>
+                          <a:cs typeface="Calibri" pitchFamily="34" charset="-120"/>
+                        </a:rPr>
+                        <a:t>First</a:t>
+                      </a:r>
+                      <a:endParaRPr lang="en-US" sz="1300" dirty="0">
+                        <a:latin typeface="Calibri" charset="0"/>
+                        <a:ea typeface="Calibri" charset="0"/>
+                        <a:cs typeface="Calibri" charset="0"/>
+                      </a:endParaRPr>
+                    </a:p>
+                  </a:txBody>
+                  <a:tcPr marL="91440" marR="91440" marT="45720" marB="45720">
+                    <a:lnL w="6350" cap="flat" cmpd="sng" algn="ctr">
+                      <a:solidFill>
+                        <a:srgbClr val="E5E2DC"/>
+                      </a:solidFill>
+                      <a:prstDash val="solid"/>
+                      <a:round/>
+                      <a:headEnd type="none" w="med" len="med"/>
+                      <a:tailEnd type="none" w="med" len="med"/>
+                    </a:lnL>
+                    <a:lnR w="6350" cap="flat" cmpd="sng" algn="ctr">
+                      <a:solidFill>
+                        <a:srgbClr val="E5E2DC"/>
+                      </a:solidFill>
+                      <a:prstDash val="solid"/>
+                      <a:round/>
+                      <a:headEnd type="none" w="med" len="med"/>
+                      <a:tailEnd type="none" w="med" len="med"/>
+                    </a:lnR>
+                    <a:lnT w="6350" cap="flat" cmpd="sng" algn="ctr">
+                      <a:solidFill>
+                        <a:srgbClr val="E5E2DC"/>
+                      </a:solidFill>
+                      <a:prstDash val="solid"/>
+                      <a:round/>
+                      <a:headEnd type="none" w="med" len="med"/>
+                      <a:tailEnd type="none" w="med" len="med"/>
+                    </a:lnT>
+                    <a:lnB w="6350" cap="flat" cmpd="sng" algn="ctr">
+                      <a:solidFill>
+                        <a:srgbClr val="E5E2DC"/>
+                      </a:solidFill>
+                      <a:prstDash val="solid"/>
+                      <a:round/>
+                      <a:headEnd type="none" w="med" len="med"/>
+                      <a:tailEnd type="none" w="med" len="med"/>
+                    </a:lnB>
+                  </a:tcPr>
+                </a:tc>
+                <a:tc>
+                  <a:txBody>
+                    <a:bodyPr/>
+                    <a:lstStyle/>
+                    <a:p>
+                      <a:pPr indent="0" marL="0">
+                        <a:buNone/>
+                      </a:pPr>
+                      <a:r>
+                        <a:rPr lang="en-US" sz="1300" dirty="0">
+                          <a:solidFill>
+                            <a:srgbClr val="3D3A36"/>
+                          </a:solidFill>
+                          <a:latin typeface="Calibri" pitchFamily="34" charset="0"/>
+                          <a:ea typeface="Calibri" pitchFamily="34" charset="-122"/>
+                          <a:cs typeface="Calibri" pitchFamily="34" charset="-120"/>
+                        </a:rPr>
+                        <a:t>No net force = no change</a:t>
+                      </a:r>
+                      <a:endParaRPr lang="en-US" sz="1300" dirty="0">
+                        <a:latin typeface="Calibri" charset="0"/>
+                        <a:ea typeface="Calibri" charset="0"/>
+                        <a:cs typeface="Calibri" charset="0"/>
+                      </a:endParaRPr>
+                    </a:p>
+                  </a:txBody>
+                  <a:tcPr marL="91440" marR="91440" marT="45720" marB="45720">
+                    <a:lnL w="6350" cap="flat" cmpd="sng" algn="ctr">
+                      <a:solidFill>
+                        <a:srgbClr val="E5E2DC"/>
+                      </a:solidFill>
+                      <a:prstDash val="solid"/>
+                      <a:round/>
+                      <a:headEnd type="none" w="med" len="med"/>
+                      <a:tailEnd type="none" w="med" len="med"/>
+                    </a:lnL>
+                    <a:lnR w="6350" cap="flat" cmpd="sng" algn="ctr">
+                      <a:solidFill>
+                        <a:srgbClr val="E5E2DC"/>
+                      </a:solidFill>
+                      <a:prstDash val="solid"/>
+                      <a:round/>
+                      <a:headEnd type="none" w="med" len="med"/>
+                      <a:tailEnd type="none" w="med" len="med"/>
+                    </a:lnR>
+                    <a:lnT w="6350" cap="flat" cmpd="sng" algn="ctr">
+                      <a:solidFill>
+                        <a:srgbClr val="E5E2DC"/>
+                      </a:solidFill>
+                      <a:prstDash val="solid"/>
+                      <a:round/>
+                      <a:headEnd type="none" w="med" len="med"/>
+                      <a:tailEnd type="none" w="med" len="med"/>
+                    </a:lnT>
+                    <a:lnB w="6350" cap="flat" cmpd="sng" algn="ctr">
+                      <a:solidFill>
+                        <a:srgbClr val="E5E2DC"/>
+                      </a:solidFill>
+                      <a:prstDash val="solid"/>
+                      <a:round/>
+                      <a:headEnd type="none" w="med" len="med"/>
+                      <a:tailEnd type="none" w="med" len="med"/>
+                    </a:lnB>
+                  </a:tcPr>
+                </a:tc>
+                <a:tc>
+                  <a:txBody>
+                    <a:bodyPr/>
+                    <a:lstStyle/>
+                    <a:p>
+                      <a:pPr indent="0" marL="0">
+                        <a:buNone/>
+                      </a:pPr>
+                      <a:r>
+                        <a:rPr lang="en-US" sz="1300" dirty="0">
+                          <a:solidFill>
+                            <a:srgbClr val="3D3A36"/>
+                          </a:solidFill>
+                          <a:latin typeface="Calibri" pitchFamily="34" charset="0"/>
+                          <a:ea typeface="Calibri" pitchFamily="34" charset="-122"/>
+                          <a:cs typeface="Calibri" pitchFamily="34" charset="-120"/>
+                        </a:rPr>
+                        <a:t>Inertia</a:t>
+                      </a:r>
+                      <a:endParaRPr lang="en-US" sz="1300" dirty="0">
+                        <a:latin typeface="Calibri" charset="0"/>
+                        <a:ea typeface="Calibri" charset="0"/>
+                        <a:cs typeface="Calibri" charset="0"/>
+                      </a:endParaRPr>
+                    </a:p>
+                  </a:txBody>
+                  <a:tcPr marL="91440" marR="91440" marT="45720" marB="45720">
+                    <a:lnL w="6350" cap="flat" cmpd="sng" algn="ctr">
+                      <a:solidFill>
+                        <a:srgbClr val="E5E2DC"/>
+                      </a:solidFill>
+                      <a:prstDash val="solid"/>
+                      <a:round/>
+                      <a:headEnd type="none" w="med" len="med"/>
+                      <a:tailEnd type="none" w="med" len="med"/>
+                    </a:lnL>
+                    <a:lnR w="6350" cap="flat" cmpd="sng" algn="ctr">
+                      <a:solidFill>
+                        <a:srgbClr val="E5E2DC"/>
+                      </a:solidFill>
+                      <a:prstDash val="solid"/>
+                      <a:round/>
+                      <a:headEnd type="none" w="med" len="med"/>
+                      <a:tailEnd type="none" w="med" len="med"/>
+                    </a:lnR>
+                    <a:lnT w="6350" cap="flat" cmpd="sng" algn="ctr">
+                      <a:solidFill>
+                        <a:srgbClr val="E5E2DC"/>
+                      </a:solidFill>
+                      <a:prstDash val="solid"/>
+                      <a:round/>
+                      <a:headEnd type="none" w="med" len="med"/>
+                      <a:tailEnd type="none" w="med" len="med"/>
+                    </a:lnT>
+                    <a:lnB w="6350" cap="flat" cmpd="sng" algn="ctr">
+                      <a:solidFill>
+                        <a:srgbClr val="E5E2DC"/>
+                      </a:solidFill>
+                      <a:prstDash val="solid"/>
+                      <a:round/>
+                      <a:headEnd type="none" w="med" len="med"/>
+                      <a:tailEnd type="none" w="med" len="med"/>
+                    </a:lnB>
+                  </a:tcPr>
+                </a:tc>
+              </a:tr>
+              <a:tr h="502920">
+                <a:tc>
+                  <a:txBody>
+                    <a:bodyPr/>
+                    <a:lstStyle/>
+                    <a:p>
+                      <a:pPr indent="0" marL="0">
+                        <a:buNone/>
+                      </a:pPr>
+                      <a:r>
+                        <a:rPr lang="en-US" sz="1300" dirty="0">
+                          <a:solidFill>
+                            <a:srgbClr val="3D3A36"/>
+                          </a:solidFill>
+                          <a:latin typeface="Calibri" pitchFamily="34" charset="0"/>
+                          <a:ea typeface="Calibri" pitchFamily="34" charset="-122"/>
+                          <a:cs typeface="Calibri" pitchFamily="34" charset="-120"/>
+                        </a:rPr>
+                        <a:t>Second</a:t>
+                      </a:r>
+                      <a:endParaRPr lang="en-US" sz="1300" dirty="0">
+                        <a:latin typeface="Calibri" charset="0"/>
+                        <a:ea typeface="Calibri" charset="0"/>
+                        <a:cs typeface="Calibri" charset="0"/>
+                      </a:endParaRPr>
+                    </a:p>
+                  </a:txBody>
+                  <a:tcPr marL="91440" marR="91440" marT="45720" marB="45720">
+                    <a:lnL w="6350" cap="flat" cmpd="sng" algn="ctr">
+                      <a:solidFill>
+                        <a:srgbClr val="E5E2DC"/>
+                      </a:solidFill>
+                      <a:prstDash val="solid"/>
+                      <a:round/>
+                      <a:headEnd type="none" w="med" len="med"/>
+                      <a:tailEnd type="none" w="med" len="med"/>
+                    </a:lnL>
+                    <a:lnR w="6350" cap="flat" cmpd="sng" algn="ctr">
+                      <a:solidFill>
+                        <a:srgbClr val="E5E2DC"/>
+                      </a:solidFill>
+                      <a:prstDash val="solid"/>
+                      <a:round/>
+                      <a:headEnd type="none" w="med" len="med"/>
+                      <a:tailEnd type="none" w="med" len="med"/>
+                    </a:lnR>
+                    <a:lnT w="6350" cap="flat" cmpd="sng" algn="ctr">
+                      <a:solidFill>
+                        <a:srgbClr val="E5E2DC"/>
+                      </a:solidFill>
+                      <a:prstDash val="solid"/>
+                      <a:round/>
+                      <a:headEnd type="none" w="med" len="med"/>
+                      <a:tailEnd type="none" w="med" len="med"/>
+                    </a:lnT>
+                    <a:lnB w="6350" cap="flat" cmpd="sng" algn="ctr">
+                      <a:solidFill>
+                        <a:srgbClr val="E5E2DC"/>
+                      </a:solidFill>
+                      <a:prstDash val="solid"/>
+                      <a:round/>
+                      <a:headEnd type="none" w="med" len="med"/>
+                      <a:tailEnd type="none" w="med" len="med"/>
+                    </a:lnB>
+                  </a:tcPr>
+                </a:tc>
+                <a:tc>
+                  <a:txBody>
+                    <a:bodyPr/>
+                    <a:lstStyle/>
+                    <a:p>
+                      <a:pPr indent="0" marL="0">
+                        <a:buNone/>
+                      </a:pPr>
+                      <a:r>
+                        <a:rPr lang="en-US" sz="1300" dirty="0">
+                          <a:solidFill>
+                            <a:srgbClr val="3D3A36"/>
+                          </a:solidFill>
+                          <a:latin typeface="Calibri" pitchFamily="34" charset="0"/>
+                          <a:ea typeface="Calibri" pitchFamily="34" charset="-122"/>
+                          <a:cs typeface="Calibri" pitchFamily="34" charset="-120"/>
+                        </a:rPr>
+                        <a:t>Force causes acceleration</a:t>
+                      </a:r>
+                      <a:endParaRPr lang="en-US" sz="1300" dirty="0">
+                        <a:latin typeface="Calibri" charset="0"/>
+                        <a:ea typeface="Calibri" charset="0"/>
+                        <a:cs typeface="Calibri" charset="0"/>
+                      </a:endParaRPr>
+                    </a:p>
+                  </a:txBody>
+                  <a:tcPr marL="91440" marR="91440" marT="45720" marB="45720">
+                    <a:lnL w="6350" cap="flat" cmpd="sng" algn="ctr">
+                      <a:solidFill>
+                        <a:srgbClr val="E5E2DC"/>
+                      </a:solidFill>
+                      <a:prstDash val="solid"/>
+                      <a:round/>
+                      <a:headEnd type="none" w="med" len="med"/>
+                      <a:tailEnd type="none" w="med" len="med"/>
+                    </a:lnL>
+                    <a:lnR w="6350" cap="flat" cmpd="sng" algn="ctr">
+                      <a:solidFill>
+                        <a:srgbClr val="E5E2DC"/>
+                      </a:solidFill>
+                      <a:prstDash val="solid"/>
+                      <a:round/>
+                      <a:headEnd type="none" w="med" len="med"/>
+                      <a:tailEnd type="none" w="med" len="med"/>
+                    </a:lnR>
+                    <a:lnT w="6350" cap="flat" cmpd="sng" algn="ctr">
+                      <a:solidFill>
+                        <a:srgbClr val="E5E2DC"/>
+                      </a:solidFill>
+                      <a:prstDash val="solid"/>
+                      <a:round/>
+                      <a:headEnd type="none" w="med" len="med"/>
+                      <a:tailEnd type="none" w="med" len="med"/>
+                    </a:lnT>
+                    <a:lnB w="6350" cap="flat" cmpd="sng" algn="ctr">
+                      <a:solidFill>
+                        <a:srgbClr val="E5E2DC"/>
+                      </a:solidFill>
+                      <a:prstDash val="solid"/>
+                      <a:round/>
+                      <a:headEnd type="none" w="med" len="med"/>
+                      <a:tailEnd type="none" w="med" len="med"/>
+                    </a:lnB>
+                  </a:tcPr>
+                </a:tc>
+                <a:tc>
+                  <a:txBody>
+                    <a:bodyPr/>
+                    <a:lstStyle/>
+                    <a:p>
+                      <a:pPr indent="0" marL="0">
+                        <a:buNone/>
+                      </a:pPr>
+                      <a:r>
+                        <a:rPr lang="en-US" sz="1300" dirty="0">
+                          <a:solidFill>
+                            <a:srgbClr val="3D3A36"/>
+                          </a:solidFill>
+                          <a:latin typeface="Calibri" pitchFamily="34" charset="0"/>
+                          <a:ea typeface="Calibri" pitchFamily="34" charset="-122"/>
+                          <a:cs typeface="Calibri" pitchFamily="34" charset="-120"/>
+                        </a:rPr>
+                        <a:t>F = ma</a:t>
+                      </a:r>
+                      <a:endParaRPr lang="en-US" sz="1300" dirty="0">
+                        <a:latin typeface="Calibri" charset="0"/>
+                        <a:ea typeface="Calibri" charset="0"/>
+                        <a:cs typeface="Calibri" charset="0"/>
+                      </a:endParaRPr>
+                    </a:p>
+                  </a:txBody>
+                  <a:tcPr marL="91440" marR="91440" marT="45720" marB="45720">
+                    <a:lnL w="6350" cap="flat" cmpd="sng" algn="ctr">
+                      <a:solidFill>
+                        <a:srgbClr val="E5E2DC"/>
+                      </a:solidFill>
+                      <a:prstDash val="solid"/>
+                      <a:round/>
+                      <a:headEnd type="none" w="med" len="med"/>
+                      <a:tailEnd type="none" w="med" len="med"/>
+                    </a:lnL>
+                    <a:lnR w="6350" cap="flat" cmpd="sng" algn="ctr">
+                      <a:solidFill>
+                        <a:srgbClr val="E5E2DC"/>
+                      </a:solidFill>
+                      <a:prstDash val="solid"/>
+                      <a:round/>
+                      <a:headEnd type="none" w="med" len="med"/>
+                      <a:tailEnd type="none" w="med" len="med"/>
+                    </a:lnR>
+                    <a:lnT w="6350" cap="flat" cmpd="sng" algn="ctr">
+                      <a:solidFill>
+                        <a:srgbClr val="E5E2DC"/>
+                      </a:solidFill>
+                      <a:prstDash val="solid"/>
+                      <a:round/>
+                      <a:headEnd type="none" w="med" len="med"/>
+                      <a:tailEnd type="none" w="med" len="med"/>
+                    </a:lnT>
+                    <a:lnB w="6350" cap="flat" cmpd="sng" algn="ctr">
+                      <a:solidFill>
+                        <a:srgbClr val="E5E2DC"/>
+                      </a:solidFill>
+                      <a:prstDash val="solid"/>
+                      <a:round/>
+                      <a:headEnd type="none" w="med" len="med"/>
+                      <a:tailEnd type="none" w="med" len="med"/>
+                    </a:lnB>
+                  </a:tcPr>
+                </a:tc>
+              </a:tr>
+              <a:tr h="502920">
+                <a:tc>
+                  <a:txBody>
+                    <a:bodyPr/>
+                    <a:lstStyle/>
+                    <a:p>
+                      <a:pPr indent="0" marL="0">
+                        <a:buNone/>
+                      </a:pPr>
+                      <a:r>
+                        <a:rPr lang="en-US" sz="1300" dirty="0">
+                          <a:solidFill>
+                            <a:srgbClr val="3D3A36"/>
+                          </a:solidFill>
+                          <a:latin typeface="Calibri" pitchFamily="34" charset="0"/>
+                          <a:ea typeface="Calibri" pitchFamily="34" charset="-122"/>
+                          <a:cs typeface="Calibri" pitchFamily="34" charset="-120"/>
+                        </a:rPr>
+                        <a:t>Third</a:t>
+                      </a:r>
+                      <a:endParaRPr lang="en-US" sz="1300" dirty="0">
+                        <a:latin typeface="Calibri" charset="0"/>
+                        <a:ea typeface="Calibri" charset="0"/>
+                        <a:cs typeface="Calibri" charset="0"/>
+                      </a:endParaRPr>
+                    </a:p>
+                  </a:txBody>
+                  <a:tcPr marL="91440" marR="91440" marT="45720" marB="45720">
+                    <a:lnL w="6350" cap="flat" cmpd="sng" algn="ctr">
+                      <a:solidFill>
+                        <a:srgbClr val="E5E2DC"/>
+                      </a:solidFill>
+                      <a:prstDash val="solid"/>
+                      <a:round/>
+                      <a:headEnd type="none" w="med" len="med"/>
+                      <a:tailEnd type="none" w="med" len="med"/>
+                    </a:lnL>
+                    <a:lnR w="6350" cap="flat" cmpd="sng" algn="ctr">
+                      <a:solidFill>
+                        <a:srgbClr val="E5E2DC"/>
+                      </a:solidFill>
+                      <a:prstDash val="solid"/>
+                      <a:round/>
+                      <a:headEnd type="none" w="med" len="med"/>
+                      <a:tailEnd type="none" w="med" len="med"/>
+                    </a:lnR>
+                    <a:lnT w="6350" cap="flat" cmpd="sng" algn="ctr">
+                      <a:solidFill>
+                        <a:srgbClr val="E5E2DC"/>
+                      </a:solidFill>
+                      <a:prstDash val="solid"/>
+                      <a:round/>
+                      <a:headEnd type="none" w="med" len="med"/>
+                      <a:tailEnd type="none" w="med" len="med"/>
+                    </a:lnT>
+                    <a:lnB w="6350" cap="flat" cmpd="sng" algn="ctr">
+                      <a:solidFill>
+                        <a:srgbClr val="E5E2DC"/>
+                      </a:solidFill>
+                      <a:prstDash val="solid"/>
+                      <a:round/>
+                      <a:headEnd type="none" w="med" len="med"/>
+                      <a:tailEnd type="none" w="med" len="med"/>
+                    </a:lnB>
+                  </a:tcPr>
+                </a:tc>
+                <a:tc>
+                  <a:txBody>
+                    <a:bodyPr/>
+                    <a:lstStyle/>
+                    <a:p>
+                      <a:pPr indent="0" marL="0">
+                        <a:buNone/>
+                      </a:pPr>
+                      <a:r>
+                        <a:rPr lang="en-US" sz="1300" dirty="0">
+                          <a:solidFill>
+                            <a:srgbClr val="3D3A36"/>
+                          </a:solidFill>
+                          <a:latin typeface="Calibri" pitchFamily="34" charset="0"/>
+                          <a:ea typeface="Calibri" pitchFamily="34" charset="-122"/>
+                          <a:cs typeface="Calibri" pitchFamily="34" charset="-120"/>
+                        </a:rPr>
+                        <a:t>Equal opposite reaction</a:t>
+                      </a:r>
+                      <a:endParaRPr lang="en-US" sz="1300" dirty="0">
+                        <a:latin typeface="Calibri" charset="0"/>
+                        <a:ea typeface="Calibri" charset="0"/>
+                        <a:cs typeface="Calibri" charset="0"/>
+                      </a:endParaRPr>
+                    </a:p>
+                  </a:txBody>
+                  <a:tcPr marL="91440" marR="91440" marT="45720" marB="45720">
+                    <a:lnL w="6350" cap="flat" cmpd="sng" algn="ctr">
+                      <a:solidFill>
+                        <a:srgbClr val="E5E2DC"/>
+                      </a:solidFill>
+                      <a:prstDash val="solid"/>
+                      <a:round/>
+                      <a:headEnd type="none" w="med" len="med"/>
+                      <a:tailEnd type="none" w="med" len="med"/>
+                    </a:lnL>
+                    <a:lnR w="6350" cap="flat" cmpd="sng" algn="ctr">
+                      <a:solidFill>
+                        <a:srgbClr val="E5E2DC"/>
+                      </a:solidFill>
+                      <a:prstDash val="solid"/>
+                      <a:round/>
+                      <a:headEnd type="none" w="med" len="med"/>
+                      <a:tailEnd type="none" w="med" len="med"/>
+                    </a:lnR>
+                    <a:lnT w="6350" cap="flat" cmpd="sng" algn="ctr">
+                      <a:solidFill>
+                        <a:srgbClr val="E5E2DC"/>
+                      </a:solidFill>
+                      <a:prstDash val="solid"/>
+                      <a:round/>
+                      <a:headEnd type="none" w="med" len="med"/>
+                      <a:tailEnd type="none" w="med" len="med"/>
+                    </a:lnT>
+                    <a:lnB w="6350" cap="flat" cmpd="sng" algn="ctr">
+                      <a:solidFill>
+                        <a:srgbClr val="E5E2DC"/>
+                      </a:solidFill>
+                      <a:prstDash val="solid"/>
+                      <a:round/>
+                      <a:headEnd type="none" w="med" len="med"/>
+                      <a:tailEnd type="none" w="med" len="med"/>
+                    </a:lnB>
+                  </a:tcPr>
+                </a:tc>
+                <a:tc>
+                  <a:txBody>
+                    <a:bodyPr/>
+                    <a:lstStyle/>
+                    <a:p>
+                      <a:pPr indent="0" marL="0">
+                        <a:buNone/>
+                      </a:pPr>
+                      <a:r>
+                        <a:rPr lang="en-US" sz="1300" dirty="0">
+                          <a:solidFill>
+                            <a:srgbClr val="3D3A36"/>
+                          </a:solidFill>
+                          <a:latin typeface="Calibri" pitchFamily="34" charset="0"/>
+                          <a:ea typeface="Calibri" pitchFamily="34" charset="-122"/>
+                          <a:cs typeface="Calibri" pitchFamily="34" charset="-120"/>
+                        </a:rPr>
+                        <a:t>Action-Reaction</a:t>
+                      </a:r>
+                      <a:endParaRPr lang="en-US" sz="1300" dirty="0">
+                        <a:latin typeface="Calibri" charset="0"/>
+                        <a:ea typeface="Calibri" charset="0"/>
+                        <a:cs typeface="Calibri" charset="0"/>
+                      </a:endParaRPr>
+                    </a:p>
+                  </a:txBody>
+                  <a:tcPr marL="91440" marR="91440" marT="45720" marB="45720">
+                    <a:lnL w="6350" cap="flat" cmpd="sng" algn="ctr">
+                      <a:solidFill>
+                        <a:srgbClr val="E5E2DC"/>
+                      </a:solidFill>
+                      <a:prstDash val="solid"/>
+                      <a:round/>
+                      <a:headEnd type="none" w="med" len="med"/>
+                      <a:tailEnd type="none" w="med" len="med"/>
+                    </a:lnL>
+                    <a:lnR w="6350" cap="flat" cmpd="sng" algn="ctr">
+                      <a:solidFill>
+                        <a:srgbClr val="E5E2DC"/>
+                      </a:solidFill>
+                      <a:prstDash val="solid"/>
+                      <a:round/>
+                      <a:headEnd type="none" w="med" len="med"/>
+                      <a:tailEnd type="none" w="med" len="med"/>
+                    </a:lnR>
+                    <a:lnT w="6350" cap="flat" cmpd="sng" algn="ctr">
+                      <a:solidFill>
+                        <a:srgbClr val="E5E2DC"/>
+                      </a:solidFill>
+                      <a:prstDash val="solid"/>
+                      <a:round/>
+                      <a:headEnd type="none" w="med" len="med"/>
+                      <a:tailEnd type="none" w="med" len="med"/>
+                    </a:lnT>
+                    <a:lnB w="6350" cap="flat" cmpd="sng" algn="ctr">
+                      <a:solidFill>
+                        <a:srgbClr val="E5E2DC"/>
+                      </a:solidFill>
+                      <a:prstDash val="solid"/>
+                      <a:round/>
+                      <a:headEnd type="none" w="med" len="med"/>
+                      <a:tailEnd type="none" w="med" len="med"/>
+                    </a:lnB>
+                  </a:tcPr>
+                </a:tc>
+              </a:tr>
+            </a:tbl>
+          </a:graphicData>
+        </a:graphic>
+      </p:graphicFrame>
+    </p:spTree>
+  </p:cSld>
+  <p:clrMapOvr>
+    <a:masterClrMapping/>
+  </p:clrMapOvr>
+</p:sld>
+</file>
+
+<file path=ppt/slides/slide7.xml><?xml version="1.0" encoding="utf-8"?>
+<p:sld xmlns:a="http://schemas.openxmlformats.org/drawingml/2006/main" xmlns:r="http://schemas.openxmlformats.org/officeDocument/2006/relationships" xmlns:p="http://schemas.openxmlformats.org/presentationml/2006/main">
+  <p:cSld name="Slide 7">
+    <p:bg>
+      <p:bgPr>
+        <a:solidFill>
+          <a:srgbClr val="FAF8F5"/>
+        </a:solidFill>
+      </p:bgPr>
+    </p:bg>
+    <p:spTree>
+      <p:nvGrpSpPr>
+        <p:cNvPr id="1" name=""/>
+        <p:cNvGrpSpPr/>
+        <p:nvPr/>
+      </p:nvGrpSpPr>
+      <p:grpSpPr>
+        <a:xfrm>
+          <a:off x="0" y="0"/>
+          <a:ext cx="0" cy="0"/>
+          <a:chOff x="0" y="0"/>
+          <a:chExt cx="0" cy="0"/>
+        </a:xfrm>
+      </p:grpSpPr>
+      <p:sp>
+        <p:nvSpPr>
+          <p:cNvPr id="2" name="Shape 0"/>
+          <p:cNvSpPr/>
+          <p:nvPr/>
+        </p:nvSpPr>
+        <p:spPr>
+          <a:xfrm>
+            <a:off x="0" y="0"/>
+            <a:ext cx="9144000" cy="822960"/>
+          </a:xfrm>
+          <a:prstGeom prst="rect">
+            <a:avLst/>
+          </a:prstGeom>
+          <a:solidFill>
+            <a:srgbClr val="FFFFFF"/>
+          </a:solidFill>
+          <a:ln/>
+        </p:spPr>
+      </p:sp>
+      <p:sp>
+        <p:nvSpPr>
+          <p:cNvPr id="3" name="Shape 1"/>
+          <p:cNvSpPr/>
+          <p:nvPr/>
+        </p:nvSpPr>
+        <p:spPr>
+          <a:xfrm>
+            <a:off x="0" y="795528"/>
+            <a:ext cx="9144000" cy="27432"/>
+          </a:xfrm>
+          <a:prstGeom prst="rect">
+            <a:avLst/>
+          </a:prstGeom>
+          <a:solidFill>
+            <a:srgbClr val="C8372D"/>
+          </a:solidFill>
+          <a:ln/>
+        </p:spPr>
+      </p:sp>
+      <p:sp>
+        <p:nvSpPr>
+          <p:cNvPr id="4" name="Text 2"/>
+          <p:cNvSpPr/>
+          <p:nvPr/>
+        </p:nvSpPr>
+        <p:spPr>
+          <a:xfrm>
+            <a:off x="640080" y="91440"/>
+            <a:ext cx="7863840" cy="640080"/>
+          </a:xfrm>
+          <a:prstGeom prst="rect">
+            <a:avLst/>
+          </a:prstGeom>
+          <a:noFill/>
+          <a:ln/>
+        </p:spPr>
+        <p:txBody>
+          <a:bodyPr wrap="square" lIns="0" tIns="0" rIns="0" bIns="0" rtlCol="0" anchor="ctr"/>
+          <a:lstStyle/>
+          <a:p>
+            <a:pPr indent="0" marL="0">
+              <a:buNone/>
+            </a:pPr>
+            <a:r>
+              <a:rPr lang="en-US" sz="2200" b="1" dirty="0">
+                <a:solidFill>
+                  <a:srgbClr val="1B2A4A"/>
+                </a:solidFill>
+                <a:latin typeface="Georgia" pitchFamily="34" charset="0"/>
+                <a:ea typeface="Georgia" pitchFamily="34" charset="-122"/>
+                <a:cs typeface="Georgia" pitchFamily="34" charset="-120"/>
+              </a:rPr>
+              <a:t>Recommended Videos</a:t>
+            </a:r>
+            <a:endParaRPr lang="en-US" sz="2200" dirty="0"/>
+          </a:p>
+        </p:txBody>
+      </p:sp>
+      <p:sp>
+        <p:nvSpPr>
+          <p:cNvPr id="5" name="Text 3"/>
+          <p:cNvSpPr/>
+          <p:nvPr/>
+        </p:nvSpPr>
+        <p:spPr>
+          <a:xfrm>
+            <a:off x="640080" y="868680"/>
+            <a:ext cx="7863840" cy="274320"/>
+          </a:xfrm>
+          <a:prstGeom prst="rect">
+            <a:avLst/>
+          </a:prstGeom>
+          <a:noFill/>
+          <a:ln/>
+        </p:spPr>
+        <p:txBody>
+          <a:bodyPr wrap="square" rtlCol="0" anchor="ctr"/>
+          <a:lstStyle/>
+          <a:p>
+            <a:pPr indent="0" marL="0">
+              <a:buNone/>
+            </a:pPr>
+            <a:r>
+              <a:rPr lang="en-US" sz="1200" i="1" dirty="0">
+                <a:solidFill>
+                  <a:srgbClr val="6B6660"/>
+                </a:solidFill>
+                <a:latin typeface="Calibri" pitchFamily="34" charset="0"/>
+                <a:ea typeface="Calibri" pitchFamily="34" charset="-122"/>
+                <a:cs typeface="Calibri" pitchFamily="34" charset="-120"/>
+              </a:rPr>
+              <a:t>Search these on YouTube to learn more.</a:t>
+            </a:r>
+            <a:endParaRPr lang="en-US" sz="1200" dirty="0"/>
+          </a:p>
+        </p:txBody>
+      </p:sp>
+      <p:sp>
+        <p:nvSpPr>
+          <p:cNvPr id="6" name="Shape 4"/>
+          <p:cNvSpPr/>
+          <p:nvPr/>
+        </p:nvSpPr>
+        <p:spPr>
+          <a:xfrm>
+            <a:off x="457200" y="1234440"/>
+            <a:ext cx="8229600" cy="1051560"/>
+          </a:xfrm>
+          <a:prstGeom prst="rect">
+            <a:avLst/>
+          </a:prstGeom>
+          <a:solidFill>
+            <a:srgbClr val="FFFFFF"/>
+          </a:solidFill>
+          <a:ln/>
+          <a:effectLst>
+            <a:outerShdw sx="100000" sy="100000" kx="0" ky="0" algn="bl" rotWithShape="0" blurRad="76200" dist="25400" dir="8100000">
+              <a:srgbClr val="000000">
+                <a:alpha val="12000"/>
+              </a:srgbClr>
+            </a:outerShdw>
+          </a:effectLst>
+        </p:spPr>
+      </p:sp>
+      <p:sp>
+        <p:nvSpPr>
+          <p:cNvPr id="7" name="Shape 5"/>
+          <p:cNvSpPr/>
+          <p:nvPr/>
+        </p:nvSpPr>
+        <p:spPr>
+          <a:xfrm>
+            <a:off x="457200" y="1234440"/>
+            <a:ext cx="64008" cy="1051560"/>
+          </a:xfrm>
+          <a:prstGeom prst="rect">
+            <a:avLst/>
+          </a:prstGeom>
+          <a:solidFill>
+            <a:srgbClr val="C8372D"/>
+          </a:solidFill>
+          <a:ln/>
+        </p:spPr>
+      </p:sp>
+      <p:sp>
+        <p:nvSpPr>
+          <p:cNvPr id="8" name="Text 6"/>
+          <p:cNvSpPr/>
+          <p:nvPr/>
+        </p:nvSpPr>
+        <p:spPr>
+          <a:xfrm>
+            <a:off x="640080" y="1325880"/>
+            <a:ext cx="457200" cy="457200"/>
+          </a:xfrm>
+          <a:prstGeom prst="rect">
+            <a:avLst/>
+          </a:prstGeom>
+          <a:noFill/>
+          <a:ln/>
+        </p:spPr>
+        <p:txBody>
+          <a:bodyPr wrap="square" rtlCol="0" anchor="ctr"/>
+          <a:lstStyle/>
+          <a:p>
+            <a:pPr algn="ctr" indent="0" marL="0">
+              <a:buNone/>
+            </a:pPr>
+            <a:r>
+              <a:rPr lang="en-US" sz="2000" dirty="0">
+                <a:solidFill>
+                  <a:srgbClr val="C8372D"/>
+                </a:solidFill>
+                <a:latin typeface="Calibri" pitchFamily="34" charset="0"/>
+                <a:ea typeface="Calibri" pitchFamily="34" charset="-122"/>
+                <a:cs typeface="Calibri" pitchFamily="34" charset="-120"/>
+              </a:rPr>
+              <a:t>▶</a:t>
+            </a:r>
+            <a:endParaRPr lang="en-US" sz="2000" dirty="0"/>
+          </a:p>
+        </p:txBody>
+      </p:sp>
+      <p:sp>
+        <p:nvSpPr>
+          <p:cNvPr id="9" name="Text 7"/>
+          <p:cNvSpPr/>
+          <p:nvPr/>
+        </p:nvSpPr>
+        <p:spPr>
+          <a:xfrm>
+            <a:off x="1188720" y="1307592"/>
+            <a:ext cx="7132320" cy="411480"/>
+          </a:xfrm>
+          <a:prstGeom prst="rect">
+            <a:avLst/>
+          </a:prstGeom>
+          <a:noFill/>
+          <a:ln/>
+        </p:spPr>
+        <p:txBody>
+          <a:bodyPr wrap="square" rtlCol="0" anchor="ctr"/>
+          <a:lstStyle/>
+          <a:p>
+            <a:pPr indent="0" marL="0">
+              <a:buNone/>
+            </a:pPr>
+            <a:r>
+              <a:rPr lang="en-US" sz="1400" b="1" dirty="0">
+                <a:solidFill>
+                  <a:srgbClr val="1B2A4A"/>
+                </a:solidFill>
+                <a:latin typeface="Calibri" pitchFamily="34" charset="0"/>
+                <a:ea typeface="Calibri" pitchFamily="34" charset="-122"/>
+                <a:cs typeface="Calibri" pitchFamily="34" charset="-120"/>
+              </a:rPr>
+              <a:t>Newton's Three Laws of Motion</a:t>
+            </a:r>
+            <a:endParaRPr lang="en-US" sz="1400" dirty="0"/>
+          </a:p>
+        </p:txBody>
+      </p:sp>
+      <p:sp>
+        <p:nvSpPr>
+          <p:cNvPr id="10" name="Text 8"/>
+          <p:cNvSpPr/>
+          <p:nvPr/>
+        </p:nvSpPr>
+        <p:spPr>
+          <a:xfrm>
+            <a:off x="1188720" y="1691640"/>
+            <a:ext cx="7132320" cy="320040"/>
+          </a:xfrm>
+          <a:prstGeom prst="rect">
+            <a:avLst/>
+          </a:prstGeom>
+          <a:noFill/>
+          <a:ln/>
+        </p:spPr>
+        <p:txBody>
+          <a:bodyPr wrap="square" rtlCol="0" anchor="ctr"/>
+          <a:lstStyle/>
+          <a:p>
+            <a:pPr indent="0" marL="0">
+              <a:buNone/>
+            </a:pPr>
+            <a:r>
+              <a:rPr lang="en-US" sz="1100" dirty="0">
+                <a:solidFill>
+                  <a:srgbClr val="6B6660"/>
+                </a:solidFill>
+                <a:latin typeface="Calibri" pitchFamily="34" charset="0"/>
+                <a:ea typeface="Calibri" pitchFamily="34" charset="-122"/>
+                <a:cs typeface="Calibri" pitchFamily="34" charset="-120"/>
+              </a:rPr>
+              <a:t>TED-Ed  •  4 min</a:t>
+            </a:r>
+            <a:endParaRPr lang="en-US" sz="1100" dirty="0"/>
+          </a:p>
+        </p:txBody>
+      </p:sp>
+      <p:sp>
+        <p:nvSpPr>
+          <p:cNvPr id="11" name="Shape 9"/>
+          <p:cNvSpPr/>
+          <p:nvPr/>
+        </p:nvSpPr>
+        <p:spPr>
+          <a:xfrm>
+            <a:off x="457200" y="2423160"/>
+            <a:ext cx="8229600" cy="1051560"/>
+          </a:xfrm>
+          <a:prstGeom prst="rect">
+            <a:avLst/>
+          </a:prstGeom>
+          <a:solidFill>
+            <a:srgbClr val="FFFFFF"/>
+          </a:solidFill>
+          <a:ln/>
+          <a:effectLst>
+            <a:outerShdw sx="100000" sy="100000" kx="0" ky="0" algn="bl" rotWithShape="0" blurRad="76200" dist="25400" dir="8100000">
+              <a:srgbClr val="000000">
+                <a:alpha val="12000"/>
+              </a:srgbClr>
+            </a:outerShdw>
+          </a:effectLst>
+        </p:spPr>
+      </p:sp>
+      <p:sp>
+        <p:nvSpPr>
+          <p:cNvPr id="12" name="Shape 10"/>
+          <p:cNvSpPr/>
+          <p:nvPr/>
+        </p:nvSpPr>
+        <p:spPr>
+          <a:xfrm>
+            <a:off x="457200" y="2423160"/>
+            <a:ext cx="64008" cy="1051560"/>
+          </a:xfrm>
+          <a:prstGeom prst="rect">
+            <a:avLst/>
+          </a:prstGeom>
+          <a:solidFill>
+            <a:srgbClr val="C8372D"/>
+          </a:solidFill>
+          <a:ln/>
+        </p:spPr>
+      </p:sp>
+      <p:sp>
+        <p:nvSpPr>
+          <p:cNvPr id="13" name="Text 11"/>
+          <p:cNvSpPr/>
+          <p:nvPr/>
+        </p:nvSpPr>
+        <p:spPr>
+          <a:xfrm>
+            <a:off x="640080" y="2514600"/>
+            <a:ext cx="457200" cy="457200"/>
+          </a:xfrm>
+          <a:prstGeom prst="rect">
+            <a:avLst/>
+          </a:prstGeom>
+          <a:noFill/>
+          <a:ln/>
+        </p:spPr>
+        <p:txBody>
+          <a:bodyPr wrap="square" rtlCol="0" anchor="ctr"/>
+          <a:lstStyle/>
+          <a:p>
+            <a:pPr algn="ctr" indent="0" marL="0">
+              <a:buNone/>
+            </a:pPr>
+            <a:r>
+              <a:rPr lang="en-US" sz="2000" dirty="0">
+                <a:solidFill>
+                  <a:srgbClr val="C8372D"/>
+                </a:solidFill>
+                <a:latin typeface="Calibri" pitchFamily="34" charset="0"/>
+                <a:ea typeface="Calibri" pitchFamily="34" charset="-122"/>
+                <a:cs typeface="Calibri" pitchFamily="34" charset="-120"/>
+              </a:rPr>
+              <a:t>▶</a:t>
+            </a:r>
+            <a:endParaRPr lang="en-US" sz="2000" dirty="0"/>
+          </a:p>
+        </p:txBody>
+      </p:sp>
+      <p:sp>
+        <p:nvSpPr>
+          <p:cNvPr id="14" name="Text 12"/>
+          <p:cNvSpPr/>
+          <p:nvPr/>
+        </p:nvSpPr>
+        <p:spPr>
+          <a:xfrm>
+            <a:off x="1188720" y="2496312"/>
+            <a:ext cx="7132320" cy="411480"/>
+          </a:xfrm>
+          <a:prstGeom prst="rect">
+            <a:avLst/>
+          </a:prstGeom>
+          <a:noFill/>
+          <a:ln/>
+        </p:spPr>
+        <p:txBody>
+          <a:bodyPr wrap="square" rtlCol="0" anchor="ctr"/>
+          <a:lstStyle/>
+          <a:p>
+            <a:pPr indent="0" marL="0">
+              <a:buNone/>
+            </a:pPr>
+            <a:r>
+              <a:rPr lang="en-US" sz="1400" b="1" dirty="0">
+                <a:solidFill>
+                  <a:srgbClr val="1B2A4A"/>
+                </a:solidFill>
+                <a:latin typeface="Calibri" pitchFamily="34" charset="0"/>
+                <a:ea typeface="Calibri" pitchFamily="34" charset="-122"/>
+                <a:cs typeface="Calibri" pitchFamily="34" charset="-120"/>
+              </a:rPr>
+              <a:t>Newton's Laws — The Whole Chapter in 15 Minutes</a:t>
+            </a:r>
+            <a:endParaRPr lang="en-US" sz="1400" dirty="0"/>
+          </a:p>
+        </p:txBody>
+      </p:sp>
+      <p:sp>
+        <p:nvSpPr>
+          <p:cNvPr id="15" name="Text 13"/>
+          <p:cNvSpPr/>
+          <p:nvPr/>
+        </p:nvSpPr>
+        <p:spPr>
+          <a:xfrm>
+            <a:off x="1188720" y="2880360"/>
+            <a:ext cx="7132320" cy="320040"/>
+          </a:xfrm>
+          <a:prstGeom prst="rect">
+            <a:avLst/>
+          </a:prstGeom>
+          <a:noFill/>
+          <a:ln/>
+        </p:spPr>
+        <p:txBody>
+          <a:bodyPr wrap="square" rtlCol="0" anchor="ctr"/>
+          <a:lstStyle/>
+          <a:p>
+            <a:pPr indent="0" marL="0">
+              <a:buNone/>
+            </a:pPr>
+            <a:r>
+              <a:rPr lang="en-US" sz="1100" dirty="0">
+                <a:solidFill>
+                  <a:srgbClr val="6B6660"/>
+                </a:solidFill>
+                <a:latin typeface="Calibri" pitchFamily="34" charset="0"/>
+                <a:ea typeface="Calibri" pitchFamily="34" charset="-122"/>
+                <a:cs typeface="Calibri" pitchFamily="34" charset="-120"/>
+              </a:rPr>
+              <a:t>Cognito  •  15 min</a:t>
+            </a:r>
+            <a:endParaRPr lang="en-US" sz="1100" dirty="0"/>
+          </a:p>
+        </p:txBody>
+      </p:sp>
+      <p:sp>
+        <p:nvSpPr>
+          <p:cNvPr id="16" name="Shape 14"/>
+          <p:cNvSpPr/>
+          <p:nvPr/>
+        </p:nvSpPr>
+        <p:spPr>
+          <a:xfrm>
+            <a:off x="457200" y="3611880"/>
+            <a:ext cx="8229600" cy="1051560"/>
+          </a:xfrm>
+          <a:prstGeom prst="rect">
+            <a:avLst/>
+          </a:prstGeom>
+          <a:solidFill>
+            <a:srgbClr val="FFFFFF"/>
+          </a:solidFill>
+          <a:ln/>
+          <a:effectLst>
+            <a:outerShdw sx="100000" sy="100000" kx="0" ky="0" algn="bl" rotWithShape="0" blurRad="76200" dist="25400" dir="8100000">
+              <a:srgbClr val="000000">
+                <a:alpha val="12000"/>
+              </a:srgbClr>
+            </a:outerShdw>
+          </a:effectLst>
+        </p:spPr>
+      </p:sp>
+      <p:sp>
+        <p:nvSpPr>
+          <p:cNvPr id="17" name="Shape 15"/>
+          <p:cNvSpPr/>
+          <p:nvPr/>
+        </p:nvSpPr>
+        <p:spPr>
+          <a:xfrm>
+            <a:off x="457200" y="3611880"/>
+            <a:ext cx="64008" cy="1051560"/>
+          </a:xfrm>
+          <a:prstGeom prst="rect">
+            <a:avLst/>
+          </a:prstGeom>
+          <a:solidFill>
+            <a:srgbClr val="C8372D"/>
+          </a:solidFill>
+          <a:ln/>
+        </p:spPr>
+      </p:sp>
+      <p:sp>
+        <p:nvSpPr>
+          <p:cNvPr id="18" name="Text 16"/>
+          <p:cNvSpPr/>
+          <p:nvPr/>
+        </p:nvSpPr>
+        <p:spPr>
+          <a:xfrm>
+            <a:off x="640080" y="3703320"/>
+            <a:ext cx="457200" cy="457200"/>
+          </a:xfrm>
+          <a:prstGeom prst="rect">
+            <a:avLst/>
+          </a:prstGeom>
+          <a:noFill/>
+          <a:ln/>
+        </p:spPr>
+        <p:txBody>
+          <a:bodyPr wrap="square" rtlCol="0" anchor="ctr"/>
+          <a:lstStyle/>
+          <a:p>
+            <a:pPr algn="ctr" indent="0" marL="0">
+              <a:buNone/>
+            </a:pPr>
+            <a:r>
+              <a:rPr lang="en-US" sz="2000" dirty="0">
+                <a:solidFill>
+                  <a:srgbClr val="C8372D"/>
+                </a:solidFill>
+                <a:latin typeface="Calibri" pitchFamily="34" charset="0"/>
+                <a:ea typeface="Calibri" pitchFamily="34" charset="-122"/>
+                <a:cs typeface="Calibri" pitchFamily="34" charset="-120"/>
+              </a:rPr>
+              <a:t>▶</a:t>
+            </a:r>
+            <a:endParaRPr lang="en-US" sz="2000" dirty="0"/>
+          </a:p>
+        </p:txBody>
+      </p:sp>
+      <p:sp>
+        <p:nvSpPr>
+          <p:cNvPr id="19" name="Text 17"/>
+          <p:cNvSpPr/>
+          <p:nvPr/>
+        </p:nvSpPr>
+        <p:spPr>
+          <a:xfrm>
+            <a:off x="1188720" y="3685032"/>
+            <a:ext cx="7132320" cy="411480"/>
+          </a:xfrm>
+          <a:prstGeom prst="rect">
+            <a:avLst/>
+          </a:prstGeom>
+          <a:noFill/>
+          <a:ln/>
+        </p:spPr>
+        <p:txBody>
+          <a:bodyPr wrap="square" rtlCol="0" anchor="ctr"/>
+          <a:lstStyle/>
+          <a:p>
+            <a:pPr indent="0" marL="0">
+              <a:buNone/>
+            </a:pPr>
+            <a:r>
+              <a:rPr lang="en-US" sz="1400" b="1" dirty="0">
+                <a:solidFill>
+                  <a:srgbClr val="1B2A4A"/>
+                </a:solidFill>
+                <a:latin typeface="Calibri" pitchFamily="34" charset="0"/>
+                <a:ea typeface="Calibri" pitchFamily="34" charset="-122"/>
+                <a:cs typeface="Calibri" pitchFamily="34" charset="-120"/>
+              </a:rPr>
+              <a:t>Newton's Second Law (F = ma)</a:t>
+            </a:r>
+            <a:endParaRPr lang="en-US" sz="1400" dirty="0"/>
+          </a:p>
+        </p:txBody>
+      </p:sp>
+      <p:sp>
+        <p:nvSpPr>
+          <p:cNvPr id="20" name="Text 18"/>
+          <p:cNvSpPr/>
+          <p:nvPr/>
+        </p:nvSpPr>
+        <p:spPr>
+          <a:xfrm>
+            <a:off x="1188720" y="4069080"/>
+            <a:ext cx="7132320" cy="320040"/>
+          </a:xfrm>
+          <a:prstGeom prst="rect">
+            <a:avLst/>
+          </a:prstGeom>
+          <a:noFill/>
+          <a:ln/>
+        </p:spPr>
+        <p:txBody>
+          <a:bodyPr wrap="square" rtlCol="0" anchor="ctr"/>
+          <a:lstStyle/>
+          <a:p>
+            <a:pPr indent="0" marL="0">
+              <a:buNone/>
+            </a:pPr>
+            <a:r>
+              <a:rPr lang="en-US" sz="1100" dirty="0">
+                <a:solidFill>
+                  <a:srgbClr val="6B6660"/>
+                </a:solidFill>
+                <a:latin typeface="Calibri" pitchFamily="34" charset="0"/>
+                <a:ea typeface="Calibri" pitchFamily="34" charset="-122"/>
+                <a:cs typeface="Calibri" pitchFamily="34" charset="-120"/>
+              </a:rPr>
+              <a:t>FuseSchool  •  4 min</a:t>
+            </a:r>
+            <a:endParaRPr lang="en-US" sz="1100" dirty="0"/>
+          </a:p>
+        </p:txBody>
+      </p:sp>
+    </p:spTree>
+  </p:cSld>
+  <p:clrMapOvr>
+    <a:masterClrMapping/>
+  </p:clrMapOvr>
+</p:sld>
+</file>
+
+<file path=ppt/slides/slide8.xml><?xml version="1.0" encoding="utf-8"?>
+<p:sld xmlns:a="http://schemas.openxmlformats.org/drawingml/2006/main" xmlns:r="http://schemas.openxmlformats.org/officeDocument/2006/relationships" xmlns:p="http://schemas.openxmlformats.org/presentationml/2006/main">
+  <p:cSld name="Slide 8">
+    <p:spTree>
+      <p:nvGrpSpPr>
+        <p:cNvPr id="1" name=""/>
+        <p:cNvGrpSpPr/>
+        <p:nvPr/>
+      </p:nvGrpSpPr>
+      <p:grpSpPr>
+        <a:xfrm>
+          <a:off x="0" y="0"/>
+          <a:ext cx="0" cy="0"/>
+          <a:chOff x="0" y="0"/>
+          <a:chExt cx="0" cy="0"/>
+        </a:xfrm>
+      </p:grpSpPr>
+      <p:sp>
+        <p:nvSpPr>
+          <p:cNvPr id="2" name="Shape 0"/>
+          <p:cNvSpPr/>
+          <p:nvPr/>
+        </p:nvSpPr>
+        <p:spPr>
+          <a:xfrm>
+            <a:off x="0" y="0"/>
             <a:ext cx="9144000" cy="5143500"/>
           </a:xfrm>
           <a:prstGeom prst="rect">
@@ -2522,7 +4674,7 @@
         </p:nvSpPr>
         <p:spPr>
           <a:xfrm>
-            <a:off x="731520" y="2468880"/>
+            <a:off x="731520" y="2560320"/>
             <a:ext cx="7680960" cy="548640"/>
           </a:xfrm>
           <a:prstGeom prst="rect">
@@ -2539,7 +4691,7 @@
               <a:buNone/>
             </a:pPr>
             <a:r>
-              <a:rPr lang="en-US" sz="1800" dirty="0">
+              <a:rPr lang="en-US" sz="2000" dirty="0">
                 <a:solidFill>
                   <a:srgbClr val="C8372D"/>
                 </a:solidFill>
@@ -2547,48 +4699,9 @@
                 <a:ea typeface="Calibri" pitchFamily="34" charset="-122"/>
                 <a:cs typeface="Calibri" pitchFamily="34" charset="-120"/>
               </a:rPr>
-              <a:t>learnlattice.org/students/exam-revision</a:t>
-            </a:r>
-            <a:endParaRPr lang="en-US" sz="1800" dirty="0"/>
-          </a:p>
-        </p:txBody>
-      </p:sp>
-      <p:sp>
-        <p:nvSpPr>
-          <p:cNvPr id="6" name="Text 4"/>
-          <p:cNvSpPr/>
-          <p:nvPr/>
-        </p:nvSpPr>
-        <p:spPr>
-          <a:xfrm>
-            <a:off x="731520" y="3200400"/>
-            <a:ext cx="7680960" cy="457200"/>
-          </a:xfrm>
-          <a:prstGeom prst="rect">
-            <a:avLst/>
-          </a:prstGeom>
-          <a:noFill/>
-          <a:ln/>
-        </p:spPr>
-        <p:txBody>
-          <a:bodyPr wrap="square" rtlCol="0" anchor="ctr"/>
-          <a:lstStyle/>
-          <a:p>
-            <a:pPr algn="ctr" indent="0" marL="0">
-              <a:buNone/>
-            </a:pPr>
-            <a:r>
-              <a:rPr lang="en-US" sz="1400" dirty="0">
-                <a:solidFill>
-                  <a:srgbClr val="9B9690"/>
-                </a:solidFill>
-                <a:latin typeface="Calibri" pitchFamily="34" charset="0"/>
-                <a:ea typeface="Calibri" pitchFamily="34" charset="-122"/>
-                <a:cs typeface="Calibri" pitchFamily="34" charset="-120"/>
-              </a:rPr>
               <a:t>mrzocchi.com</a:t>
             </a:r>
-            <a:endParaRPr lang="en-US" sz="1400" dirty="0"/>
+            <a:endParaRPr lang="en-US" sz="2000" dirty="0"/>
           </a:p>
         </p:txBody>
       </p:sp>
